--- a/public/fun/pack/pptx/talk/발표템플릿_47_교육·강의_성탄절우체국.pptx
+++ b/public/fun/pack/pptx/talk/발표템플릿_47_교육·강의_성탄절우체국.pptx
@@ -3286,6 +3286,14 @@
 <file path=ppt/slides/slide1.xml><?xml version="1.0" encoding="utf-8"?>
 <p:sld xmlns:a="http://schemas.openxmlformats.org/drawingml/2006/main" xmlns:p="http://schemas.openxmlformats.org/presentationml/2006/main" xmlns:r="http://schemas.openxmlformats.org/officeDocument/2006/relationships">
   <p:cSld>
+    <p:bg>
+      <p:bgPr>
+        <a:solidFill>
+          <a:srgbClr val="D5F6E0"/>
+        </a:solidFill>
+        <a:effectLst/>
+      </p:bgPr>
+    </p:bg>
     <p:spTree>
       <p:nvGrpSpPr>
         <p:cNvPr id="1" name=""/>
@@ -3293,30 +3301,102 @@
         <p:nvPr/>
       </p:nvGrpSpPr>
       <p:grpSpPr/>
-      <p:pic>
-        <p:nvPicPr>
-          <p:cNvPr id="3" name="표지 그림" descr="talk-47.jpg"/>
-          <p:cNvPicPr>
-            <a:picLocks noChangeAspect="1"/>
-          </p:cNvPicPr>
+      <p:sp>
+        <p:nvSpPr>
+          <p:cNvPr id="3" name="장식"/>
+          <p:cNvSpPr/>
           <p:nvPr/>
-        </p:nvPicPr>
-        <p:blipFill>
-          <a:blip r:embed="rId2"/>
-          <a:stretch>
-            <a:fillRect/>
-          </a:stretch>
-        </p:blipFill>
-        <p:spPr>
-          <a:xfrm>
-            <a:off x="0" y="0"/>
-            <a:ext cx="12191695" cy="6858000"/>
+        </p:nvSpPr>
+        <p:spPr>
+          <a:xfrm>
+            <a:off x="7802684" y="0"/>
+            <a:ext cx="4389010" cy="6858000"/>
           </a:xfrm>
           <a:prstGeom prst="rect">
             <a:avLst/>
           </a:prstGeom>
-        </p:spPr>
-      </p:pic>
+          <a:solidFill>
+            <a:srgbClr val="FFFFFF"/>
+          </a:solidFill>
+          <a:ln>
+            <a:noFill/>
+          </a:ln>
+        </p:spPr>
+        <p:txBody>
+          <a:bodyPr rtlCol="0" anchor="ctr"/>
+          <a:lstStyle/>
+          <a:p>
+            <a:pPr algn="ctr"/>
+          </a:p>
+        </p:txBody>
+      </p:sp>
+      <p:sp>
+        <p:nvSpPr>
+          <p:cNvPr id="4" name="장식"/>
+          <p:cNvSpPr/>
+          <p:nvPr/>
+        </p:nvSpPr>
+        <p:spPr>
+          <a:xfrm>
+            <a:off x="8168435" y="365760"/>
+            <a:ext cx="3657508" cy="6126480"/>
+          </a:xfrm>
+          <a:prstGeom prst="rect">
+            <a:avLst/>
+          </a:prstGeom>
+          <a:noFill/>
+          <a:ln w="9525">
+            <a:solidFill>
+              <a:srgbClr val="26231F"/>
+            </a:solidFill>
+          </a:ln>
+        </p:spPr>
+        <p:txBody>
+          <a:bodyPr rtlCol="0" anchor="ctr"/>
+          <a:lstStyle/>
+          <a:p>
+            <a:pPr algn="ctr"/>
+          </a:p>
+        </p:txBody>
+      </p:sp>
+      <p:sp>
+        <p:nvSpPr>
+          <p:cNvPr id="5" name="라벨"/>
+          <p:cNvSpPr txBox="1"/>
+          <p:nvPr/>
+        </p:nvSpPr>
+        <p:spPr>
+          <a:xfrm>
+            <a:off x="822960" y="2148840"/>
+            <a:ext cx="5608179" cy="274320"/>
+          </a:xfrm>
+          <a:prstGeom prst="rect">
+            <a:avLst/>
+          </a:prstGeom>
+          <a:noFill/>
+        </p:spPr>
+        <p:txBody>
+          <a:bodyPr wrap="square" lIns="54864" rIns="54864" tIns="27432" bIns="27432" anchor="t">
+            <a:noAutofit/>
+          </a:bodyPr>
+          <a:lstStyle/>
+          <a:p>
+            <a:pPr algn="l">
+              <a:lnSpc>
+                <a:spcPct val="115000"/>
+              </a:lnSpc>
+            </a:pPr>
+            <a:r>
+              <a:rPr sz="1000" b="1" i="0" spc="250">
+                <a:solidFill>
+                  <a:srgbClr val="26231F"/>
+                </a:solidFill>
+              </a:rPr>
+              <a:t>PRESENTATION</a:t>
+            </a:r>
+          </a:p>
+        </p:txBody>
+      </p:sp>
       <p:sp>
         <p:nvSpPr>
           <p:cNvPr id="2" name="Title 1"/>
@@ -3329,8 +3409,8 @@
         </p:nvSpPr>
         <p:spPr>
           <a:xfrm>
-            <a:off x="853418" y="2057400"/>
-            <a:ext cx="6095847" cy="1554480"/>
+            <a:off x="822960" y="2606040"/>
+            <a:ext cx="5608179" cy="1188720"/>
           </a:xfrm>
         </p:spPr>
         <p:txBody>
@@ -3345,9 +3425,9 @@
               </a:lnSpc>
             </a:pPr>
             <a:r>
-              <a:rPr sz="3600" b="1" i="0">
+              <a:rPr sz="4000" b="1" i="0">
                 <a:solidFill>
-                  <a:srgbClr val="183A23"/>
+                  <a:srgbClr val="26231F"/>
                 </a:solidFill>
               </a:rPr>
               <a:t>발표 제목을 입력하세요</a:t>
@@ -3357,14 +3437,14 @@
       </p:sp>
       <p:sp>
         <p:nvSpPr>
-          <p:cNvPr id="4" name="한 줄 문구"/>
+          <p:cNvPr id="6" name="한 줄 문구"/>
           <p:cNvSpPr txBox="1"/>
           <p:nvPr/>
         </p:nvSpPr>
         <p:spPr>
           <a:xfrm>
-            <a:off x="853418" y="3749039"/>
-            <a:ext cx="6095847" cy="822960"/>
+            <a:off x="822960" y="3886200"/>
+            <a:ext cx="5608179" cy="822960"/>
           </a:xfrm>
           <a:prstGeom prst="rect">
             <a:avLst/>
@@ -3383,9 +3463,9 @@
               </a:lnSpc>
             </a:pPr>
             <a:r>
-              <a:rPr sz="1700" b="0" i="1">
+              <a:rPr sz="1700" b="0" i="0">
                 <a:solidFill>
-                  <a:srgbClr val="183A23"/>
+                  <a:srgbClr val="26231F"/>
                 </a:solidFill>
               </a:rPr>
               <a:t>끝나고 한 줄로 정리해 보는 시간이 있습니다</a:t>
@@ -3395,14 +3475,14 @@
       </p:sp>
       <p:sp>
         <p:nvSpPr>
-          <p:cNvPr id="5" name="안내 문구"/>
+          <p:cNvPr id="7" name="안내 문구"/>
           <p:cNvSpPr txBox="1"/>
           <p:nvPr/>
         </p:nvSpPr>
         <p:spPr>
           <a:xfrm>
-            <a:off x="853418" y="4617720"/>
-            <a:ext cx="6095847" cy="914400"/>
+            <a:off x="822960" y="4754880"/>
+            <a:ext cx="5608179" cy="914400"/>
           </a:xfrm>
           <a:prstGeom prst="rect">
             <a:avLst/>
@@ -3423,7 +3503,7 @@
             <a:r>
               <a:rPr sz="1400" b="0" i="0">
                 <a:solidFill>
-                  <a:srgbClr val="666666"/>
+                  <a:srgbClr val="26231F"/>
                 </a:solidFill>
               </a:rPr>
               <a:t>교육·강의 · 발표자 이름</a:t>
@@ -3438,10 +3518,10 @@
             <a:r>
               <a:rPr sz="1400" b="0" i="0">
                 <a:solidFill>
-                  <a:srgbClr val="666666"/>
+                  <a:srgbClr val="26231F"/>
                 </a:solidFill>
               </a:rPr>
-              <a:t>2027. 00. 00</a:t>
+              <a:t>날짜 입력</a:t>
             </a:r>
           </a:p>
         </p:txBody>
@@ -3480,14 +3560,14 @@
         </p:nvSpPr>
         <p:spPr>
           <a:xfrm>
-            <a:off x="9905695" y="-1463040"/>
-            <a:ext cx="3840480" cy="3840480"/>
-          </a:xfrm>
-          <a:prstGeom prst="ellipse">
+            <a:off x="0" y="6565392"/>
+            <a:ext cx="12191695" cy="292608"/>
+          </a:xfrm>
+          <a:prstGeom prst="rect">
             <a:avLst/>
           </a:prstGeom>
           <a:solidFill>
-            <a:srgbClr val="D2EFDC"/>
+            <a:srgbClr val="ADEBC2"/>
           </a:solidFill>
           <a:ln>
             <a:noFill/>
@@ -3503,20 +3583,20 @@
       </p:sp>
       <p:sp>
         <p:nvSpPr>
-          <p:cNvPr id="4" name="장식"/>
+          <p:cNvPr id="4" name="포인트"/>
           <p:cNvSpPr/>
           <p:nvPr/>
         </p:nvSpPr>
         <p:spPr>
           <a:xfrm>
-            <a:off x="11094415" y="274320"/>
-            <a:ext cx="411480" cy="411480"/>
-          </a:xfrm>
-          <a:prstGeom prst="ellipse">
+            <a:off x="5958687" y="246888"/>
+            <a:ext cx="274320" cy="274320"/>
+          </a:xfrm>
+          <a:prstGeom prst="sun">
             <a:avLst/>
           </a:prstGeom>
           <a:solidFill>
-            <a:srgbClr val="29653D"/>
+            <a:srgbClr val="98E1B1"/>
           </a:solidFill>
           <a:ln>
             <a:noFill/>
@@ -3527,6 +3607,73 @@
           <a:lstStyle/>
           <a:p>
             <a:pPr algn="ctr"/>
+          </a:p>
+        </p:txBody>
+      </p:sp>
+      <p:sp>
+        <p:nvSpPr>
+          <p:cNvPr id="5" name="장식"/>
+          <p:cNvSpPr/>
+          <p:nvPr/>
+        </p:nvSpPr>
+        <p:spPr>
+          <a:xfrm>
+            <a:off x="5684367" y="1572768"/>
+            <a:ext cx="822960" cy="22860"/>
+          </a:xfrm>
+          <a:prstGeom prst="rect">
+            <a:avLst/>
+          </a:prstGeom>
+          <a:solidFill>
+            <a:srgbClr val="98E1B1"/>
+          </a:solidFill>
+          <a:ln>
+            <a:noFill/>
+          </a:ln>
+        </p:spPr>
+        <p:txBody>
+          <a:bodyPr rtlCol="0" anchor="ctr"/>
+          <a:lstStyle/>
+          <a:p>
+            <a:pPr algn="ctr"/>
+          </a:p>
+        </p:txBody>
+      </p:sp>
+      <p:sp>
+        <p:nvSpPr>
+          <p:cNvPr id="6" name="상단 라벨"/>
+          <p:cNvSpPr txBox="1"/>
+          <p:nvPr/>
+        </p:nvSpPr>
+        <p:spPr>
+          <a:xfrm>
+            <a:off x="640080" y="182880"/>
+            <a:ext cx="3657600" cy="274320"/>
+          </a:xfrm>
+          <a:prstGeom prst="rect">
+            <a:avLst/>
+          </a:prstGeom>
+          <a:noFill/>
+        </p:spPr>
+        <p:txBody>
+          <a:bodyPr wrap="square" lIns="54864" rIns="54864" tIns="27432" bIns="27432" anchor="ctr">
+            <a:noAutofit/>
+          </a:bodyPr>
+          <a:lstStyle/>
+          <a:p>
+            <a:pPr algn="l">
+              <a:lnSpc>
+                <a:spcPct val="115000"/>
+              </a:lnSpc>
+            </a:pPr>
+            <a:r>
+              <a:rPr sz="800" b="1" i="0" spc="250">
+                <a:solidFill>
+                  <a:srgbClr val="8E8780"/>
+                </a:solidFill>
+              </a:rPr>
+              <a:t>PRESENTATION</a:t>
+            </a:r>
           </a:p>
         </p:txBody>
       </p:sp>
@@ -3542,8 +3689,8 @@
         </p:nvSpPr>
         <p:spPr>
           <a:xfrm>
-            <a:off x="640080" y="457200"/>
-            <a:ext cx="9722815" cy="868680"/>
+            <a:off x="1371600" y="640080"/>
+            <a:ext cx="9448495" cy="868680"/>
           </a:xfrm>
         </p:spPr>
         <p:txBody>
@@ -3552,7 +3699,7 @@
           </a:bodyPr>
           <a:lstStyle/>
           <a:p>
-            <a:pPr algn="l">
+            <a:pPr algn="ctr">
               <a:lnSpc>
                 <a:spcPct val="105000"/>
               </a:lnSpc>
@@ -3560,7 +3707,7 @@
             <a:r>
               <a:rPr sz="3000" b="1" i="0">
                 <a:solidFill>
-                  <a:srgbClr val="183A23"/>
+                  <a:srgbClr val="26231F"/>
                 </a:solidFill>
               </a:rPr>
               <a:t>목차</a:t>
@@ -3570,26 +3717,26 @@
       </p:sp>
       <p:sp>
         <p:nvSpPr>
-          <p:cNvPr id="5" name="줄 1"/>
+          <p:cNvPr id="7" name="줄 1"/>
           <p:cNvSpPr/>
           <p:nvPr/>
         </p:nvSpPr>
         <p:spPr>
           <a:xfrm>
-            <a:off x="640080" y="1600200"/>
+            <a:off x="640080" y="1783080"/>
             <a:ext cx="10911535" cy="914400"/>
           </a:xfrm>
           <a:prstGeom prst="roundRect">
             <a:avLst>
-              <a:gd name="adj" fmla="val 8000"/>
+              <a:gd name="adj" fmla="val 7000"/>
             </a:avLst>
           </a:prstGeom>
           <a:solidFill>
-            <a:srgbClr val="F1F9F3"/>
+            <a:srgbClr val="FFFFFF"/>
           </a:solidFill>
           <a:ln w="12700">
             <a:solidFill>
-              <a:srgbClr val="D2EFDC"/>
+              <a:srgbClr val="ADEBC2"/>
             </a:solidFill>
           </a:ln>
         </p:spPr>
@@ -3603,57 +3750,14 @@
       </p:sp>
       <p:sp>
         <p:nvSpPr>
-          <p:cNvPr id="6" name="번호 1"/>
-          <p:cNvSpPr/>
-          <p:nvPr/>
-        </p:nvSpPr>
-        <p:spPr>
-          <a:xfrm>
-            <a:off x="822959" y="1828800"/>
-            <a:ext cx="457200" cy="457200"/>
-          </a:xfrm>
-          <a:prstGeom prst="ellipse">
-            <a:avLst/>
-          </a:prstGeom>
-          <a:solidFill>
-            <a:srgbClr val="29653D"/>
-          </a:solidFill>
-          <a:ln>
-            <a:noFill/>
-          </a:ln>
-        </p:spPr>
-        <p:txBody>
-          <a:bodyPr rtlCol="0" anchor="ctr" wrap="square" lIns="54864" rIns="54864" tIns="27432" bIns="27432">
-            <a:noAutofit/>
-          </a:bodyPr>
-          <a:lstStyle/>
-          <a:p>
-            <a:pPr algn="ctr">
-              <a:lnSpc>
-                <a:spcPct val="100000"/>
-              </a:lnSpc>
-            </a:pPr>
-            <a:r>
-              <a:rPr sz="1600" b="1" i="0">
-                <a:solidFill>
-                  <a:srgbClr val="FFFFFF"/>
-                </a:solidFill>
-              </a:rPr>
-              <a:t>1</a:t>
-            </a:r>
-          </a:p>
-        </p:txBody>
-      </p:sp>
-      <p:sp>
-        <p:nvSpPr>
-          <p:cNvPr id="7" name="TextBox 6"/>
+          <p:cNvPr id="8" name="번호 1"/>
           <p:cNvSpPr txBox="1"/>
           <p:nvPr/>
         </p:nvSpPr>
         <p:spPr>
           <a:xfrm>
-            <a:off x="1508760" y="1645920"/>
-            <a:ext cx="2743200" cy="822960"/>
+            <a:off x="731519" y="1965960"/>
+            <a:ext cx="914400" cy="548640"/>
           </a:xfrm>
           <a:prstGeom prst="rect">
             <a:avLst/>
@@ -3672,26 +3776,26 @@
               </a:lnSpc>
             </a:pPr>
             <a:r>
-              <a:rPr sz="1800" b="1" i="0">
+              <a:rPr sz="2400" b="1" i="0">
                 <a:solidFill>
-                  <a:srgbClr val="183A23"/>
+                  <a:srgbClr val="98E1B1"/>
                 </a:solidFill>
               </a:rPr>
-              <a:t>오늘의 목표</a:t>
-            </a:r>
-          </a:p>
-        </p:txBody>
-      </p:sp>
-      <p:sp>
-        <p:nvSpPr>
-          <p:cNvPr id="8" name="TextBox 7"/>
+              <a:t>01</a:t>
+            </a:r>
+          </a:p>
+        </p:txBody>
+      </p:sp>
+      <p:sp>
+        <p:nvSpPr>
+          <p:cNvPr id="9" name="TextBox 8"/>
           <p:cNvSpPr txBox="1"/>
           <p:nvPr/>
         </p:nvSpPr>
         <p:spPr>
           <a:xfrm>
-            <a:off x="4297680" y="1645920"/>
-            <a:ext cx="7071055" cy="822960"/>
+            <a:off x="1508760" y="1828800"/>
+            <a:ext cx="2743200" cy="822960"/>
           </a:xfrm>
           <a:prstGeom prst="rect">
             <a:avLst/>
@@ -3710,102 +3814,26 @@
               </a:lnSpc>
             </a:pPr>
             <a:r>
-              <a:rPr sz="1500" b="0" i="0">
+              <a:rPr sz="1800" b="1" i="0">
                 <a:solidFill>
-                  <a:srgbClr val="2B2B2B"/>
+                  <a:srgbClr val="274932"/>
                 </a:solidFill>
               </a:rPr>
-              <a:t>한 줄로 내용을 적어 주세요</a:t>
-            </a:r>
-          </a:p>
-        </p:txBody>
-      </p:sp>
-      <p:sp>
-        <p:nvSpPr>
-          <p:cNvPr id="9" name="줄 2"/>
-          <p:cNvSpPr/>
-          <p:nvPr/>
-        </p:nvSpPr>
-        <p:spPr>
-          <a:xfrm>
-            <a:off x="640080" y="2651760"/>
-            <a:ext cx="10911535" cy="914400"/>
-          </a:xfrm>
-          <a:prstGeom prst="roundRect">
-            <a:avLst>
-              <a:gd name="adj" fmla="val 8000"/>
-            </a:avLst>
-          </a:prstGeom>
-          <a:solidFill>
-            <a:srgbClr val="F1F9F3"/>
-          </a:solidFill>
-          <a:ln w="12700">
-            <a:solidFill>
-              <a:srgbClr val="D2EFDC"/>
-            </a:solidFill>
-          </a:ln>
-        </p:spPr>
-        <p:txBody>
-          <a:bodyPr rtlCol="0" anchor="ctr"/>
-          <a:lstStyle/>
-          <a:p>
-            <a:pPr algn="ctr"/>
-          </a:p>
-        </p:txBody>
-      </p:sp>
-      <p:sp>
-        <p:nvSpPr>
-          <p:cNvPr id="10" name="번호 2"/>
-          <p:cNvSpPr/>
-          <p:nvPr/>
-        </p:nvSpPr>
-        <p:spPr>
-          <a:xfrm>
-            <a:off x="822959" y="2880360"/>
-            <a:ext cx="457200" cy="457200"/>
-          </a:xfrm>
-          <a:prstGeom prst="ellipse">
-            <a:avLst/>
-          </a:prstGeom>
-          <a:solidFill>
-            <a:srgbClr val="29653D"/>
-          </a:solidFill>
-          <a:ln>
-            <a:noFill/>
-          </a:ln>
-        </p:spPr>
-        <p:txBody>
-          <a:bodyPr rtlCol="0" anchor="ctr" wrap="square" lIns="54864" rIns="54864" tIns="27432" bIns="27432">
-            <a:noAutofit/>
-          </a:bodyPr>
-          <a:lstStyle/>
-          <a:p>
-            <a:pPr algn="ctr">
-              <a:lnSpc>
-                <a:spcPct val="100000"/>
-              </a:lnSpc>
-            </a:pPr>
-            <a:r>
-              <a:rPr sz="1600" b="1" i="0">
-                <a:solidFill>
-                  <a:srgbClr val="FFFFFF"/>
-                </a:solidFill>
-              </a:rPr>
-              <a:t>2</a:t>
-            </a:r>
-          </a:p>
-        </p:txBody>
-      </p:sp>
-      <p:sp>
-        <p:nvSpPr>
-          <p:cNvPr id="11" name="TextBox 10"/>
+              <a:t>오늘의 목표</a:t>
+            </a:r>
+          </a:p>
+        </p:txBody>
+      </p:sp>
+      <p:sp>
+        <p:nvSpPr>
+          <p:cNvPr id="10" name="TextBox 9"/>
           <p:cNvSpPr txBox="1"/>
           <p:nvPr/>
         </p:nvSpPr>
         <p:spPr>
           <a:xfrm>
-            <a:off x="1508760" y="2697479"/>
-            <a:ext cx="2743200" cy="822960"/>
+            <a:off x="4297680" y="1828800"/>
+            <a:ext cx="7071055" cy="822960"/>
           </a:xfrm>
           <a:prstGeom prst="rect">
             <a:avLst/>
@@ -3824,26 +3852,59 @@
               </a:lnSpc>
             </a:pPr>
             <a:r>
-              <a:rPr sz="1800" b="1" i="0">
+              <a:rPr sz="1500" b="0" i="0">
                 <a:solidFill>
-                  <a:srgbClr val="183A23"/>
+                  <a:srgbClr val="26231F"/>
                 </a:solidFill>
               </a:rPr>
-              <a:t>핵심 개념</a:t>
-            </a:r>
-          </a:p>
-        </p:txBody>
-      </p:sp>
-      <p:sp>
-        <p:nvSpPr>
-          <p:cNvPr id="12" name="TextBox 11"/>
+              <a:t>한 줄로 내용을 적어 주세요</a:t>
+            </a:r>
+          </a:p>
+        </p:txBody>
+      </p:sp>
+      <p:sp>
+        <p:nvSpPr>
+          <p:cNvPr id="11" name="줄 2"/>
+          <p:cNvSpPr/>
+          <p:nvPr/>
+        </p:nvSpPr>
+        <p:spPr>
+          <a:xfrm>
+            <a:off x="640080" y="2834639"/>
+            <a:ext cx="10911535" cy="914400"/>
+          </a:xfrm>
+          <a:prstGeom prst="roundRect">
+            <a:avLst>
+              <a:gd name="adj" fmla="val 7000"/>
+            </a:avLst>
+          </a:prstGeom>
+          <a:solidFill>
+            <a:srgbClr val="FFFFFF"/>
+          </a:solidFill>
+          <a:ln w="12700">
+            <a:solidFill>
+              <a:srgbClr val="ADEBC2"/>
+            </a:solidFill>
+          </a:ln>
+        </p:spPr>
+        <p:txBody>
+          <a:bodyPr rtlCol="0" anchor="ctr"/>
+          <a:lstStyle/>
+          <a:p>
+            <a:pPr algn="ctr"/>
+          </a:p>
+        </p:txBody>
+      </p:sp>
+      <p:sp>
+        <p:nvSpPr>
+          <p:cNvPr id="12" name="번호 2"/>
           <p:cNvSpPr txBox="1"/>
           <p:nvPr/>
         </p:nvSpPr>
         <p:spPr>
           <a:xfrm>
-            <a:off x="4297680" y="2697479"/>
-            <a:ext cx="7071055" cy="822960"/>
+            <a:off x="731519" y="3017520"/>
+            <a:ext cx="914400" cy="548640"/>
           </a:xfrm>
           <a:prstGeom prst="rect">
             <a:avLst/>
@@ -3862,101 +3923,25 @@
               </a:lnSpc>
             </a:pPr>
             <a:r>
-              <a:rPr sz="1500" b="0" i="0">
+              <a:rPr sz="2400" b="1" i="0">
                 <a:solidFill>
-                  <a:srgbClr val="2B2B2B"/>
+                  <a:srgbClr val="98E1B1"/>
                 </a:solidFill>
               </a:rPr>
-              <a:t>한 줄로 내용을 적어 주세요</a:t>
-            </a:r>
-          </a:p>
-        </p:txBody>
-      </p:sp>
-      <p:sp>
-        <p:nvSpPr>
-          <p:cNvPr id="13" name="줄 3"/>
-          <p:cNvSpPr/>
-          <p:nvPr/>
-        </p:nvSpPr>
-        <p:spPr>
-          <a:xfrm>
-            <a:off x="640080" y="3703320"/>
-            <a:ext cx="10911535" cy="914400"/>
-          </a:xfrm>
-          <a:prstGeom prst="roundRect">
-            <a:avLst>
-              <a:gd name="adj" fmla="val 8000"/>
-            </a:avLst>
-          </a:prstGeom>
-          <a:solidFill>
-            <a:srgbClr val="F1F9F3"/>
-          </a:solidFill>
-          <a:ln w="12700">
-            <a:solidFill>
-              <a:srgbClr val="D2EFDC"/>
-            </a:solidFill>
-          </a:ln>
-        </p:spPr>
-        <p:txBody>
-          <a:bodyPr rtlCol="0" anchor="ctr"/>
-          <a:lstStyle/>
-          <a:p>
-            <a:pPr algn="ctr"/>
-          </a:p>
-        </p:txBody>
-      </p:sp>
-      <p:sp>
-        <p:nvSpPr>
-          <p:cNvPr id="14" name="번호 3"/>
-          <p:cNvSpPr/>
-          <p:nvPr/>
-        </p:nvSpPr>
-        <p:spPr>
-          <a:xfrm>
-            <a:off x="822959" y="3931920"/>
-            <a:ext cx="457200" cy="457200"/>
-          </a:xfrm>
-          <a:prstGeom prst="ellipse">
-            <a:avLst/>
-          </a:prstGeom>
-          <a:solidFill>
-            <a:srgbClr val="29653D"/>
-          </a:solidFill>
-          <a:ln>
-            <a:noFill/>
-          </a:ln>
-        </p:spPr>
-        <p:txBody>
-          <a:bodyPr rtlCol="0" anchor="ctr" wrap="square" lIns="54864" rIns="54864" tIns="27432" bIns="27432">
-            <a:noAutofit/>
-          </a:bodyPr>
-          <a:lstStyle/>
-          <a:p>
-            <a:pPr algn="ctr">
-              <a:lnSpc>
-                <a:spcPct val="100000"/>
-              </a:lnSpc>
-            </a:pPr>
-            <a:r>
-              <a:rPr sz="1600" b="1" i="0">
-                <a:solidFill>
-                  <a:srgbClr val="FFFFFF"/>
-                </a:solidFill>
-              </a:rPr>
-              <a:t>3</a:t>
-            </a:r>
-          </a:p>
-        </p:txBody>
-      </p:sp>
-      <p:sp>
-        <p:nvSpPr>
-          <p:cNvPr id="15" name="TextBox 14"/>
+              <a:t>02</a:t>
+            </a:r>
+          </a:p>
+        </p:txBody>
+      </p:sp>
+      <p:sp>
+        <p:nvSpPr>
+          <p:cNvPr id="13" name="TextBox 12"/>
           <p:cNvSpPr txBox="1"/>
           <p:nvPr/>
         </p:nvSpPr>
         <p:spPr>
           <a:xfrm>
-            <a:off x="1508760" y="3749039"/>
+            <a:off x="1508760" y="2880359"/>
             <a:ext cx="2743200" cy="822960"/>
           </a:xfrm>
           <a:prstGeom prst="rect">
@@ -3978,23 +3963,23 @@
             <a:r>
               <a:rPr sz="1800" b="1" i="0">
                 <a:solidFill>
-                  <a:srgbClr val="183A23"/>
+                  <a:srgbClr val="274932"/>
                 </a:solidFill>
               </a:rPr>
-              <a:t>실습과 예시</a:t>
-            </a:r>
-          </a:p>
-        </p:txBody>
-      </p:sp>
-      <p:sp>
-        <p:nvSpPr>
-          <p:cNvPr id="16" name="TextBox 15"/>
+              <a:t>핵심 개념</a:t>
+            </a:r>
+          </a:p>
+        </p:txBody>
+      </p:sp>
+      <p:sp>
+        <p:nvSpPr>
+          <p:cNvPr id="14" name="TextBox 13"/>
           <p:cNvSpPr txBox="1"/>
           <p:nvPr/>
         </p:nvSpPr>
         <p:spPr>
           <a:xfrm>
-            <a:off x="4297680" y="3749039"/>
+            <a:off x="4297680" y="2880359"/>
             <a:ext cx="7071055" cy="822960"/>
           </a:xfrm>
           <a:prstGeom prst="rect">
@@ -4016,7 +4001,7 @@
             <a:r>
               <a:rPr sz="1500" b="0" i="0">
                 <a:solidFill>
-                  <a:srgbClr val="2B2B2B"/>
+                  <a:srgbClr val="26231F"/>
                 </a:solidFill>
               </a:rPr>
               <a:t>한 줄로 내용을 적어 주세요</a:t>
@@ -4026,26 +4011,26 @@
       </p:sp>
       <p:sp>
         <p:nvSpPr>
-          <p:cNvPr id="17" name="줄 4"/>
+          <p:cNvPr id="15" name="줄 3"/>
           <p:cNvSpPr/>
           <p:nvPr/>
         </p:nvSpPr>
         <p:spPr>
           <a:xfrm>
-            <a:off x="640080" y="4754879"/>
+            <a:off x="640080" y="3886200"/>
             <a:ext cx="10911535" cy="914400"/>
           </a:xfrm>
           <a:prstGeom prst="roundRect">
             <a:avLst>
-              <a:gd name="adj" fmla="val 8000"/>
+              <a:gd name="adj" fmla="val 7000"/>
             </a:avLst>
           </a:prstGeom>
           <a:solidFill>
-            <a:srgbClr val="F1F9F3"/>
+            <a:srgbClr val="FFFFFF"/>
           </a:solidFill>
           <a:ln w="12700">
             <a:solidFill>
-              <a:srgbClr val="D2EFDC"/>
+              <a:srgbClr val="ADEBC2"/>
             </a:solidFill>
           </a:ln>
         </p:spPr>
@@ -4059,57 +4044,14 @@
       </p:sp>
       <p:sp>
         <p:nvSpPr>
-          <p:cNvPr id="18" name="번호 4"/>
-          <p:cNvSpPr/>
-          <p:nvPr/>
-        </p:nvSpPr>
-        <p:spPr>
-          <a:xfrm>
-            <a:off x="822959" y="4983479"/>
-            <a:ext cx="457200" cy="457200"/>
-          </a:xfrm>
-          <a:prstGeom prst="ellipse">
-            <a:avLst/>
-          </a:prstGeom>
-          <a:solidFill>
-            <a:srgbClr val="29653D"/>
-          </a:solidFill>
-          <a:ln>
-            <a:noFill/>
-          </a:ln>
-        </p:spPr>
-        <p:txBody>
-          <a:bodyPr rtlCol="0" anchor="ctr" wrap="square" lIns="54864" rIns="54864" tIns="27432" bIns="27432">
-            <a:noAutofit/>
-          </a:bodyPr>
-          <a:lstStyle/>
-          <a:p>
-            <a:pPr algn="ctr">
-              <a:lnSpc>
-                <a:spcPct val="100000"/>
-              </a:lnSpc>
-            </a:pPr>
-            <a:r>
-              <a:rPr sz="1600" b="1" i="0">
-                <a:solidFill>
-                  <a:srgbClr val="FFFFFF"/>
-                </a:solidFill>
-              </a:rPr>
-              <a:t>4</a:t>
-            </a:r>
-          </a:p>
-        </p:txBody>
-      </p:sp>
-      <p:sp>
-        <p:nvSpPr>
-          <p:cNvPr id="19" name="TextBox 18"/>
+          <p:cNvPr id="16" name="번호 3"/>
           <p:cNvSpPr txBox="1"/>
           <p:nvPr/>
         </p:nvSpPr>
         <p:spPr>
           <a:xfrm>
-            <a:off x="1508760" y="4800599"/>
-            <a:ext cx="2743200" cy="822960"/>
+            <a:off x="731519" y="4069080"/>
+            <a:ext cx="914400" cy="548640"/>
           </a:xfrm>
           <a:prstGeom prst="rect">
             <a:avLst/>
@@ -4128,26 +4070,26 @@
               </a:lnSpc>
             </a:pPr>
             <a:r>
-              <a:rPr sz="1800" b="1" i="0">
+              <a:rPr sz="2400" b="1" i="0">
                 <a:solidFill>
-                  <a:srgbClr val="183A23"/>
+                  <a:srgbClr val="98E1B1"/>
                 </a:solidFill>
               </a:rPr>
-              <a:t>정리와 질문</a:t>
-            </a:r>
-          </a:p>
-        </p:txBody>
-      </p:sp>
-      <p:sp>
-        <p:nvSpPr>
-          <p:cNvPr id="20" name="TextBox 19"/>
+              <a:t>03</a:t>
+            </a:r>
+          </a:p>
+        </p:txBody>
+      </p:sp>
+      <p:sp>
+        <p:nvSpPr>
+          <p:cNvPr id="17" name="TextBox 16"/>
           <p:cNvSpPr txBox="1"/>
           <p:nvPr/>
         </p:nvSpPr>
         <p:spPr>
           <a:xfrm>
-            <a:off x="4297680" y="4800599"/>
-            <a:ext cx="7071055" cy="822960"/>
+            <a:off x="1508760" y="3931920"/>
+            <a:ext cx="2743200" cy="822960"/>
           </a:xfrm>
           <a:prstGeom prst="rect">
             <a:avLst/>
@@ -4166,9 +4108,194 @@
               </a:lnSpc>
             </a:pPr>
             <a:r>
+              <a:rPr sz="1800" b="1" i="0">
+                <a:solidFill>
+                  <a:srgbClr val="274932"/>
+                </a:solidFill>
+              </a:rPr>
+              <a:t>실습과 예시</a:t>
+            </a:r>
+          </a:p>
+        </p:txBody>
+      </p:sp>
+      <p:sp>
+        <p:nvSpPr>
+          <p:cNvPr id="18" name="TextBox 17"/>
+          <p:cNvSpPr txBox="1"/>
+          <p:nvPr/>
+        </p:nvSpPr>
+        <p:spPr>
+          <a:xfrm>
+            <a:off x="4297680" y="3931920"/>
+            <a:ext cx="7071055" cy="822960"/>
+          </a:xfrm>
+          <a:prstGeom prst="rect">
+            <a:avLst/>
+          </a:prstGeom>
+          <a:noFill/>
+        </p:spPr>
+        <p:txBody>
+          <a:bodyPr wrap="square" lIns="54864" rIns="54864" tIns="27432" bIns="27432" anchor="ctr">
+            <a:noAutofit/>
+          </a:bodyPr>
+          <a:lstStyle/>
+          <a:p>
+            <a:pPr algn="l">
+              <a:lnSpc>
+                <a:spcPct val="115000"/>
+              </a:lnSpc>
+            </a:pPr>
+            <a:r>
               <a:rPr sz="1500" b="0" i="0">
                 <a:solidFill>
-                  <a:srgbClr val="2B2B2B"/>
+                  <a:srgbClr val="26231F"/>
+                </a:solidFill>
+              </a:rPr>
+              <a:t>한 줄로 내용을 적어 주세요</a:t>
+            </a:r>
+          </a:p>
+        </p:txBody>
+      </p:sp>
+      <p:sp>
+        <p:nvSpPr>
+          <p:cNvPr id="19" name="줄 4"/>
+          <p:cNvSpPr/>
+          <p:nvPr/>
+        </p:nvSpPr>
+        <p:spPr>
+          <a:xfrm>
+            <a:off x="640080" y="4937759"/>
+            <a:ext cx="10911535" cy="914400"/>
+          </a:xfrm>
+          <a:prstGeom prst="roundRect">
+            <a:avLst>
+              <a:gd name="adj" fmla="val 7000"/>
+            </a:avLst>
+          </a:prstGeom>
+          <a:solidFill>
+            <a:srgbClr val="FFFFFF"/>
+          </a:solidFill>
+          <a:ln w="12700">
+            <a:solidFill>
+              <a:srgbClr val="ADEBC2"/>
+            </a:solidFill>
+          </a:ln>
+        </p:spPr>
+        <p:txBody>
+          <a:bodyPr rtlCol="0" anchor="ctr"/>
+          <a:lstStyle/>
+          <a:p>
+            <a:pPr algn="ctr"/>
+          </a:p>
+        </p:txBody>
+      </p:sp>
+      <p:sp>
+        <p:nvSpPr>
+          <p:cNvPr id="20" name="번호 4"/>
+          <p:cNvSpPr txBox="1"/>
+          <p:nvPr/>
+        </p:nvSpPr>
+        <p:spPr>
+          <a:xfrm>
+            <a:off x="731519" y="5120640"/>
+            <a:ext cx="914400" cy="548640"/>
+          </a:xfrm>
+          <a:prstGeom prst="rect">
+            <a:avLst/>
+          </a:prstGeom>
+          <a:noFill/>
+        </p:spPr>
+        <p:txBody>
+          <a:bodyPr wrap="square" lIns="54864" rIns="54864" tIns="27432" bIns="27432" anchor="ctr">
+            <a:noAutofit/>
+          </a:bodyPr>
+          <a:lstStyle/>
+          <a:p>
+            <a:pPr algn="l">
+              <a:lnSpc>
+                <a:spcPct val="115000"/>
+              </a:lnSpc>
+            </a:pPr>
+            <a:r>
+              <a:rPr sz="2400" b="1" i="0">
+                <a:solidFill>
+                  <a:srgbClr val="98E1B1"/>
+                </a:solidFill>
+              </a:rPr>
+              <a:t>04</a:t>
+            </a:r>
+          </a:p>
+        </p:txBody>
+      </p:sp>
+      <p:sp>
+        <p:nvSpPr>
+          <p:cNvPr id="21" name="TextBox 20"/>
+          <p:cNvSpPr txBox="1"/>
+          <p:nvPr/>
+        </p:nvSpPr>
+        <p:spPr>
+          <a:xfrm>
+            <a:off x="1508760" y="4983479"/>
+            <a:ext cx="2743200" cy="822960"/>
+          </a:xfrm>
+          <a:prstGeom prst="rect">
+            <a:avLst/>
+          </a:prstGeom>
+          <a:noFill/>
+        </p:spPr>
+        <p:txBody>
+          <a:bodyPr wrap="square" lIns="54864" rIns="54864" tIns="27432" bIns="27432" anchor="ctr">
+            <a:noAutofit/>
+          </a:bodyPr>
+          <a:lstStyle/>
+          <a:p>
+            <a:pPr algn="l">
+              <a:lnSpc>
+                <a:spcPct val="115000"/>
+              </a:lnSpc>
+            </a:pPr>
+            <a:r>
+              <a:rPr sz="1800" b="1" i="0">
+                <a:solidFill>
+                  <a:srgbClr val="274932"/>
+                </a:solidFill>
+              </a:rPr>
+              <a:t>정리와 질문</a:t>
+            </a:r>
+          </a:p>
+        </p:txBody>
+      </p:sp>
+      <p:sp>
+        <p:nvSpPr>
+          <p:cNvPr id="22" name="TextBox 21"/>
+          <p:cNvSpPr txBox="1"/>
+          <p:nvPr/>
+        </p:nvSpPr>
+        <p:spPr>
+          <a:xfrm>
+            <a:off x="4297680" y="4983479"/>
+            <a:ext cx="7071055" cy="822960"/>
+          </a:xfrm>
+          <a:prstGeom prst="rect">
+            <a:avLst/>
+          </a:prstGeom>
+          <a:noFill/>
+        </p:spPr>
+        <p:txBody>
+          <a:bodyPr wrap="square" lIns="54864" rIns="54864" tIns="27432" bIns="27432" anchor="ctr">
+            <a:noAutofit/>
+          </a:bodyPr>
+          <a:lstStyle/>
+          <a:p>
+            <a:pPr algn="l">
+              <a:lnSpc>
+                <a:spcPct val="115000"/>
+              </a:lnSpc>
+            </a:pPr>
+            <a:r>
+              <a:rPr sz="1500" b="0" i="0">
+                <a:solidFill>
+                  <a:srgbClr val="26231F"/>
                 </a:solidFill>
               </a:rPr>
               <a:t>한 줄로 내용을 적어 주세요</a:t>
@@ -4210,14 +4337,14 @@
         </p:nvSpPr>
         <p:spPr>
           <a:xfrm>
-            <a:off x="9905695" y="-1463040"/>
-            <a:ext cx="3840480" cy="3840480"/>
-          </a:xfrm>
-          <a:prstGeom prst="ellipse">
+            <a:off x="0" y="6565392"/>
+            <a:ext cx="12191695" cy="292608"/>
+          </a:xfrm>
+          <a:prstGeom prst="rect">
             <a:avLst/>
           </a:prstGeom>
           <a:solidFill>
-            <a:srgbClr val="D2EFDC"/>
+            <a:srgbClr val="ADEBC2"/>
           </a:solidFill>
           <a:ln>
             <a:noFill/>
@@ -4233,20 +4360,20 @@
       </p:sp>
       <p:sp>
         <p:nvSpPr>
-          <p:cNvPr id="4" name="장식"/>
+          <p:cNvPr id="4" name="포인트"/>
           <p:cNvSpPr/>
           <p:nvPr/>
         </p:nvSpPr>
         <p:spPr>
           <a:xfrm>
-            <a:off x="11094415" y="274320"/>
-            <a:ext cx="411480" cy="411480"/>
-          </a:xfrm>
-          <a:prstGeom prst="ellipse">
+            <a:off x="5958687" y="246888"/>
+            <a:ext cx="274320" cy="274320"/>
+          </a:xfrm>
+          <a:prstGeom prst="sun">
             <a:avLst/>
           </a:prstGeom>
           <a:solidFill>
-            <a:srgbClr val="29653D"/>
+            <a:srgbClr val="98E1B1"/>
           </a:solidFill>
           <a:ln>
             <a:noFill/>
@@ -4257,6 +4384,73 @@
           <a:lstStyle/>
           <a:p>
             <a:pPr algn="ctr"/>
+          </a:p>
+        </p:txBody>
+      </p:sp>
+      <p:sp>
+        <p:nvSpPr>
+          <p:cNvPr id="5" name="장식"/>
+          <p:cNvSpPr/>
+          <p:nvPr/>
+        </p:nvSpPr>
+        <p:spPr>
+          <a:xfrm>
+            <a:off x="5684367" y="1572768"/>
+            <a:ext cx="822960" cy="22860"/>
+          </a:xfrm>
+          <a:prstGeom prst="rect">
+            <a:avLst/>
+          </a:prstGeom>
+          <a:solidFill>
+            <a:srgbClr val="98E1B1"/>
+          </a:solidFill>
+          <a:ln>
+            <a:noFill/>
+          </a:ln>
+        </p:spPr>
+        <p:txBody>
+          <a:bodyPr rtlCol="0" anchor="ctr"/>
+          <a:lstStyle/>
+          <a:p>
+            <a:pPr algn="ctr"/>
+          </a:p>
+        </p:txBody>
+      </p:sp>
+      <p:sp>
+        <p:nvSpPr>
+          <p:cNvPr id="6" name="상단 라벨"/>
+          <p:cNvSpPr txBox="1"/>
+          <p:nvPr/>
+        </p:nvSpPr>
+        <p:spPr>
+          <a:xfrm>
+            <a:off x="640080" y="182880"/>
+            <a:ext cx="3657600" cy="274320"/>
+          </a:xfrm>
+          <a:prstGeom prst="rect">
+            <a:avLst/>
+          </a:prstGeom>
+          <a:noFill/>
+        </p:spPr>
+        <p:txBody>
+          <a:bodyPr wrap="square" lIns="54864" rIns="54864" tIns="27432" bIns="27432" anchor="ctr">
+            <a:noAutofit/>
+          </a:bodyPr>
+          <a:lstStyle/>
+          <a:p>
+            <a:pPr algn="l">
+              <a:lnSpc>
+                <a:spcPct val="115000"/>
+              </a:lnSpc>
+            </a:pPr>
+            <a:r>
+              <a:rPr sz="800" b="1" i="0" spc="250">
+                <a:solidFill>
+                  <a:srgbClr val="8E8780"/>
+                </a:solidFill>
+              </a:rPr>
+              <a:t>PRESENTATION</a:t>
+            </a:r>
           </a:p>
         </p:txBody>
       </p:sp>
@@ -4272,8 +4466,8 @@
         </p:nvSpPr>
         <p:spPr>
           <a:xfrm>
-            <a:off x="640080" y="457200"/>
-            <a:ext cx="9722815" cy="868680"/>
+            <a:off x="1371600" y="640080"/>
+            <a:ext cx="9448495" cy="868680"/>
           </a:xfrm>
         </p:spPr>
         <p:txBody>
@@ -4282,7 +4476,7 @@
           </a:bodyPr>
           <a:lstStyle/>
           <a:p>
-            <a:pPr algn="l">
+            <a:pPr algn="ctr">
               <a:lnSpc>
                 <a:spcPct val="105000"/>
               </a:lnSpc>
@@ -4290,7 +4484,7 @@
             <a:r>
               <a:rPr sz="3000" b="1" i="0">
                 <a:solidFill>
-                  <a:srgbClr val="183A23"/>
+                  <a:srgbClr val="26231F"/>
                 </a:solidFill>
               </a:rPr>
               <a:t>핵심 메시지</a:t>
@@ -4300,13 +4494,13 @@
       </p:sp>
       <p:sp>
         <p:nvSpPr>
-          <p:cNvPr id="5" name="핵심 문장"/>
+          <p:cNvPr id="7" name="핵심 문장"/>
           <p:cNvSpPr txBox="1"/>
           <p:nvPr/>
         </p:nvSpPr>
         <p:spPr>
           <a:xfrm>
-            <a:off x="640080" y="1600200"/>
+            <a:off x="640080" y="1783080"/>
             <a:ext cx="10911535" cy="1188720"/>
           </a:xfrm>
           <a:prstGeom prst="rect">
@@ -4328,7 +4522,7 @@
             <a:r>
               <a:rPr sz="2600" b="1" i="0">
                 <a:solidFill>
-                  <a:srgbClr val="183A23"/>
+                  <a:srgbClr val="274932"/>
                 </a:solidFill>
               </a:rPr>
               <a:t>한 문장으로 말하면 — 여기에 핵심 메시지를 입력하세요</a:t>
@@ -4338,26 +4532,26 @@
       </p:sp>
       <p:sp>
         <p:nvSpPr>
-          <p:cNvPr id="6" name="카드 1"/>
+          <p:cNvPr id="8" name="카드 1"/>
           <p:cNvSpPr/>
           <p:nvPr/>
         </p:nvSpPr>
         <p:spPr>
           <a:xfrm>
-            <a:off x="640080" y="3063240"/>
+            <a:off x="640080" y="3246120"/>
             <a:ext cx="3484778" cy="3017520"/>
           </a:xfrm>
           <a:prstGeom prst="roundRect">
             <a:avLst>
-              <a:gd name="adj" fmla="val 8000"/>
+              <a:gd name="adj" fmla="val 7000"/>
             </a:avLst>
           </a:prstGeom>
           <a:solidFill>
-            <a:srgbClr val="F1F9F3"/>
+            <a:srgbClr val="FFFFFF"/>
           </a:solidFill>
-          <a:ln w="15875">
+          <a:ln w="12700">
             <a:solidFill>
-              <a:srgbClr val="D2EFDC"/>
+              <a:srgbClr val="ADEBC2"/>
             </a:solidFill>
           </a:ln>
         </p:spPr>
@@ -4371,57 +4565,14 @@
       </p:sp>
       <p:sp>
         <p:nvSpPr>
-          <p:cNvPr id="7" name="번호 1"/>
-          <p:cNvSpPr/>
-          <p:nvPr/>
-        </p:nvSpPr>
-        <p:spPr>
-          <a:xfrm>
-            <a:off x="822959" y="3246120"/>
-            <a:ext cx="457200" cy="457200"/>
-          </a:xfrm>
-          <a:prstGeom prst="ellipse">
-            <a:avLst/>
-          </a:prstGeom>
-          <a:solidFill>
-            <a:srgbClr val="29653D"/>
-          </a:solidFill>
-          <a:ln>
-            <a:noFill/>
-          </a:ln>
-        </p:spPr>
-        <p:txBody>
-          <a:bodyPr rtlCol="0" anchor="ctr" wrap="square" lIns="54864" rIns="54864" tIns="27432" bIns="27432">
-            <a:noAutofit/>
-          </a:bodyPr>
-          <a:lstStyle/>
-          <a:p>
-            <a:pPr algn="ctr">
-              <a:lnSpc>
-                <a:spcPct val="100000"/>
-              </a:lnSpc>
-            </a:pPr>
-            <a:r>
-              <a:rPr sz="1600" b="1" i="0">
-                <a:solidFill>
-                  <a:srgbClr val="FFFFFF"/>
-                </a:solidFill>
-              </a:rPr>
-              <a:t>1</a:t>
-            </a:r>
-          </a:p>
-        </p:txBody>
-      </p:sp>
-      <p:sp>
-        <p:nvSpPr>
-          <p:cNvPr id="8" name="TextBox 7"/>
+          <p:cNvPr id="9" name="번호 1"/>
           <p:cNvSpPr txBox="1"/>
           <p:nvPr/>
         </p:nvSpPr>
         <p:spPr>
           <a:xfrm>
-            <a:off x="777240" y="3840480"/>
-            <a:ext cx="3210458" cy="640080"/>
+            <a:off x="731519" y="3383280"/>
+            <a:ext cx="914400" cy="548640"/>
           </a:xfrm>
           <a:prstGeom prst="rect">
             <a:avLst/>
@@ -4440,9 +4591,47 @@
               </a:lnSpc>
             </a:pPr>
             <a:r>
+              <a:rPr sz="2400" b="1" i="0">
+                <a:solidFill>
+                  <a:srgbClr val="98E1B1"/>
+                </a:solidFill>
+              </a:rPr>
+              <a:t>01</a:t>
+            </a:r>
+          </a:p>
+        </p:txBody>
+      </p:sp>
+      <p:sp>
+        <p:nvSpPr>
+          <p:cNvPr id="10" name="TextBox 9"/>
+          <p:cNvSpPr txBox="1"/>
+          <p:nvPr/>
+        </p:nvSpPr>
+        <p:spPr>
+          <a:xfrm>
+            <a:off x="777240" y="4023360"/>
+            <a:ext cx="3210458" cy="640080"/>
+          </a:xfrm>
+          <a:prstGeom prst="rect">
+            <a:avLst/>
+          </a:prstGeom>
+          <a:noFill/>
+        </p:spPr>
+        <p:txBody>
+          <a:bodyPr wrap="square" lIns="54864" rIns="54864" tIns="27432" bIns="27432" anchor="ctr">
+            <a:noAutofit/>
+          </a:bodyPr>
+          <a:lstStyle/>
+          <a:p>
+            <a:pPr algn="l">
+              <a:lnSpc>
+                <a:spcPct val="115000"/>
+              </a:lnSpc>
+            </a:pPr>
+            <a:r>
               <a:rPr sz="1800" b="1" i="0">
                 <a:solidFill>
-                  <a:srgbClr val="183A23"/>
+                  <a:srgbClr val="274932"/>
                 </a:solidFill>
               </a:rPr>
               <a:t>알아야 할 것</a:t>
@@ -4452,13 +4641,13 @@
       </p:sp>
       <p:sp>
         <p:nvSpPr>
-          <p:cNvPr id="9" name="TextBox 8"/>
+          <p:cNvPr id="11" name="TextBox 10"/>
           <p:cNvSpPr txBox="1"/>
           <p:nvPr/>
         </p:nvSpPr>
         <p:spPr>
           <a:xfrm>
-            <a:off x="777240" y="4526280"/>
+            <a:off x="777240" y="4709160"/>
             <a:ext cx="3210458" cy="1417319"/>
           </a:xfrm>
           <a:prstGeom prst="rect">
@@ -4480,7 +4669,7 @@
             <a:r>
               <a:rPr sz="1600" b="0" i="0">
                 <a:solidFill>
-                  <a:srgbClr val="2B2B2B"/>
+                  <a:srgbClr val="26231F"/>
                 </a:solidFill>
               </a:rPr>
               <a:t>내용을 입력하세요</a:t>
@@ -4495,7 +4684,7 @@
             <a:r>
               <a:rPr sz="1600" b="0" i="0">
                 <a:solidFill>
-                  <a:srgbClr val="2B2B2B"/>
+                  <a:srgbClr val="26231F"/>
                 </a:solidFill>
               </a:rPr>
               <a:t>내용을 입력하세요</a:t>
@@ -4505,26 +4694,26 @@
       </p:sp>
       <p:sp>
         <p:nvSpPr>
-          <p:cNvPr id="10" name="카드 2"/>
+          <p:cNvPr id="12" name="카드 2"/>
           <p:cNvSpPr/>
           <p:nvPr/>
         </p:nvSpPr>
         <p:spPr>
           <a:xfrm>
-            <a:off x="4353458" y="3063240"/>
+            <a:off x="4353458" y="3246120"/>
             <a:ext cx="3484778" cy="3017520"/>
           </a:xfrm>
           <a:prstGeom prst="roundRect">
             <a:avLst>
-              <a:gd name="adj" fmla="val 8000"/>
+              <a:gd name="adj" fmla="val 7000"/>
             </a:avLst>
           </a:prstGeom>
           <a:solidFill>
-            <a:srgbClr val="F1F9F3"/>
+            <a:srgbClr val="FFFFFF"/>
           </a:solidFill>
-          <a:ln w="15875">
+          <a:ln w="12700">
             <a:solidFill>
-              <a:srgbClr val="D2EFDC"/>
+              <a:srgbClr val="ADEBC2"/>
             </a:solidFill>
           </a:ln>
         </p:spPr>
@@ -4538,57 +4727,14 @@
       </p:sp>
       <p:sp>
         <p:nvSpPr>
-          <p:cNvPr id="11" name="번호 2"/>
-          <p:cNvSpPr/>
-          <p:nvPr/>
-        </p:nvSpPr>
-        <p:spPr>
-          <a:xfrm>
-            <a:off x="4536338" y="3246120"/>
-            <a:ext cx="457200" cy="457200"/>
-          </a:xfrm>
-          <a:prstGeom prst="ellipse">
-            <a:avLst/>
-          </a:prstGeom>
-          <a:solidFill>
-            <a:srgbClr val="29653D"/>
-          </a:solidFill>
-          <a:ln>
-            <a:noFill/>
-          </a:ln>
-        </p:spPr>
-        <p:txBody>
-          <a:bodyPr rtlCol="0" anchor="ctr" wrap="square" lIns="54864" rIns="54864" tIns="27432" bIns="27432">
-            <a:noAutofit/>
-          </a:bodyPr>
-          <a:lstStyle/>
-          <a:p>
-            <a:pPr algn="ctr">
-              <a:lnSpc>
-                <a:spcPct val="100000"/>
-              </a:lnSpc>
-            </a:pPr>
-            <a:r>
-              <a:rPr sz="1600" b="1" i="0">
-                <a:solidFill>
-                  <a:srgbClr val="FFFFFF"/>
-                </a:solidFill>
-              </a:rPr>
-              <a:t>2</a:t>
-            </a:r>
-          </a:p>
-        </p:txBody>
-      </p:sp>
-      <p:sp>
-        <p:nvSpPr>
-          <p:cNvPr id="12" name="TextBox 11"/>
+          <p:cNvPr id="13" name="번호 2"/>
           <p:cNvSpPr txBox="1"/>
           <p:nvPr/>
         </p:nvSpPr>
         <p:spPr>
           <a:xfrm>
-            <a:off x="4490618" y="3840480"/>
-            <a:ext cx="3210458" cy="640080"/>
+            <a:off x="4444898" y="3383280"/>
+            <a:ext cx="914400" cy="548640"/>
           </a:xfrm>
           <a:prstGeom prst="rect">
             <a:avLst/>
@@ -4607,9 +4753,47 @@
               </a:lnSpc>
             </a:pPr>
             <a:r>
+              <a:rPr sz="2400" b="1" i="0">
+                <a:solidFill>
+                  <a:srgbClr val="98E1B1"/>
+                </a:solidFill>
+              </a:rPr>
+              <a:t>02</a:t>
+            </a:r>
+          </a:p>
+        </p:txBody>
+      </p:sp>
+      <p:sp>
+        <p:nvSpPr>
+          <p:cNvPr id="14" name="TextBox 13"/>
+          <p:cNvSpPr txBox="1"/>
+          <p:nvPr/>
+        </p:nvSpPr>
+        <p:spPr>
+          <a:xfrm>
+            <a:off x="4490618" y="4023360"/>
+            <a:ext cx="3210458" cy="640080"/>
+          </a:xfrm>
+          <a:prstGeom prst="rect">
+            <a:avLst/>
+          </a:prstGeom>
+          <a:noFill/>
+        </p:spPr>
+        <p:txBody>
+          <a:bodyPr wrap="square" lIns="54864" rIns="54864" tIns="27432" bIns="27432" anchor="ctr">
+            <a:noAutofit/>
+          </a:bodyPr>
+          <a:lstStyle/>
+          <a:p>
+            <a:pPr algn="l">
+              <a:lnSpc>
+                <a:spcPct val="115000"/>
+              </a:lnSpc>
+            </a:pPr>
+            <a:r>
               <a:rPr sz="1800" b="1" i="0">
                 <a:solidFill>
-                  <a:srgbClr val="183A23"/>
+                  <a:srgbClr val="274932"/>
                 </a:solidFill>
               </a:rPr>
               <a:t>해 볼 것</a:t>
@@ -4619,13 +4803,13 @@
       </p:sp>
       <p:sp>
         <p:nvSpPr>
-          <p:cNvPr id="13" name="TextBox 12"/>
+          <p:cNvPr id="15" name="TextBox 14"/>
           <p:cNvSpPr txBox="1"/>
           <p:nvPr/>
         </p:nvSpPr>
         <p:spPr>
           <a:xfrm>
-            <a:off x="4490618" y="4526280"/>
+            <a:off x="4490618" y="4709160"/>
             <a:ext cx="3210458" cy="1417319"/>
           </a:xfrm>
           <a:prstGeom prst="rect">
@@ -4647,7 +4831,7 @@
             <a:r>
               <a:rPr sz="1600" b="0" i="0">
                 <a:solidFill>
-                  <a:srgbClr val="2B2B2B"/>
+                  <a:srgbClr val="26231F"/>
                 </a:solidFill>
               </a:rPr>
               <a:t>내용을 입력하세요</a:t>
@@ -4662,7 +4846,7 @@
             <a:r>
               <a:rPr sz="1600" b="0" i="0">
                 <a:solidFill>
-                  <a:srgbClr val="2B2B2B"/>
+                  <a:srgbClr val="26231F"/>
                 </a:solidFill>
               </a:rPr>
               <a:t>내용을 입력하세요</a:t>
@@ -4672,26 +4856,26 @@
       </p:sp>
       <p:sp>
         <p:nvSpPr>
-          <p:cNvPr id="14" name="카드 3"/>
+          <p:cNvPr id="16" name="카드 3"/>
           <p:cNvSpPr/>
           <p:nvPr/>
         </p:nvSpPr>
         <p:spPr>
           <a:xfrm>
-            <a:off x="8066836" y="3063240"/>
+            <a:off x="8066836" y="3246120"/>
             <a:ext cx="3484778" cy="3017520"/>
           </a:xfrm>
           <a:prstGeom prst="roundRect">
             <a:avLst>
-              <a:gd name="adj" fmla="val 8000"/>
+              <a:gd name="adj" fmla="val 7000"/>
             </a:avLst>
           </a:prstGeom>
           <a:solidFill>
-            <a:srgbClr val="F1F9F3"/>
+            <a:srgbClr val="FFFFFF"/>
           </a:solidFill>
-          <a:ln w="15875">
+          <a:ln w="12700">
             <a:solidFill>
-              <a:srgbClr val="D2EFDC"/>
+              <a:srgbClr val="ADEBC2"/>
             </a:solidFill>
           </a:ln>
         </p:spPr>
@@ -4705,57 +4889,14 @@
       </p:sp>
       <p:sp>
         <p:nvSpPr>
-          <p:cNvPr id="15" name="번호 3"/>
-          <p:cNvSpPr/>
-          <p:nvPr/>
-        </p:nvSpPr>
-        <p:spPr>
-          <a:xfrm>
-            <a:off x="8249716" y="3246120"/>
-            <a:ext cx="457200" cy="457200"/>
-          </a:xfrm>
-          <a:prstGeom prst="ellipse">
-            <a:avLst/>
-          </a:prstGeom>
-          <a:solidFill>
-            <a:srgbClr val="29653D"/>
-          </a:solidFill>
-          <a:ln>
-            <a:noFill/>
-          </a:ln>
-        </p:spPr>
-        <p:txBody>
-          <a:bodyPr rtlCol="0" anchor="ctr" wrap="square" lIns="54864" rIns="54864" tIns="27432" bIns="27432">
-            <a:noAutofit/>
-          </a:bodyPr>
-          <a:lstStyle/>
-          <a:p>
-            <a:pPr algn="ctr">
-              <a:lnSpc>
-                <a:spcPct val="100000"/>
-              </a:lnSpc>
-            </a:pPr>
-            <a:r>
-              <a:rPr sz="1600" b="1" i="0">
-                <a:solidFill>
-                  <a:srgbClr val="FFFFFF"/>
-                </a:solidFill>
-              </a:rPr>
-              <a:t>3</a:t>
-            </a:r>
-          </a:p>
-        </p:txBody>
-      </p:sp>
-      <p:sp>
-        <p:nvSpPr>
-          <p:cNvPr id="16" name="TextBox 15"/>
+          <p:cNvPr id="17" name="번호 3"/>
           <p:cNvSpPr txBox="1"/>
           <p:nvPr/>
         </p:nvSpPr>
         <p:spPr>
           <a:xfrm>
-            <a:off x="8203996" y="3840480"/>
-            <a:ext cx="3210458" cy="640080"/>
+            <a:off x="8158276" y="3383280"/>
+            <a:ext cx="914400" cy="548640"/>
           </a:xfrm>
           <a:prstGeom prst="rect">
             <a:avLst/>
@@ -4774,9 +4915,47 @@
               </a:lnSpc>
             </a:pPr>
             <a:r>
+              <a:rPr sz="2400" b="1" i="0">
+                <a:solidFill>
+                  <a:srgbClr val="98E1B1"/>
+                </a:solidFill>
+              </a:rPr>
+              <a:t>03</a:t>
+            </a:r>
+          </a:p>
+        </p:txBody>
+      </p:sp>
+      <p:sp>
+        <p:nvSpPr>
+          <p:cNvPr id="18" name="TextBox 17"/>
+          <p:cNvSpPr txBox="1"/>
+          <p:nvPr/>
+        </p:nvSpPr>
+        <p:spPr>
+          <a:xfrm>
+            <a:off x="8203996" y="4023360"/>
+            <a:ext cx="3210458" cy="640080"/>
+          </a:xfrm>
+          <a:prstGeom prst="rect">
+            <a:avLst/>
+          </a:prstGeom>
+          <a:noFill/>
+        </p:spPr>
+        <p:txBody>
+          <a:bodyPr wrap="square" lIns="54864" rIns="54864" tIns="27432" bIns="27432" anchor="ctr">
+            <a:noAutofit/>
+          </a:bodyPr>
+          <a:lstStyle/>
+          <a:p>
+            <a:pPr algn="l">
+              <a:lnSpc>
+                <a:spcPct val="115000"/>
+              </a:lnSpc>
+            </a:pPr>
+            <a:r>
               <a:rPr sz="1800" b="1" i="0">
                 <a:solidFill>
-                  <a:srgbClr val="183A23"/>
+                  <a:srgbClr val="274932"/>
                 </a:solidFill>
               </a:rPr>
               <a:t>기억할 것</a:t>
@@ -4786,13 +4965,13 @@
       </p:sp>
       <p:sp>
         <p:nvSpPr>
-          <p:cNvPr id="17" name="TextBox 16"/>
+          <p:cNvPr id="19" name="TextBox 18"/>
           <p:cNvSpPr txBox="1"/>
           <p:nvPr/>
         </p:nvSpPr>
         <p:spPr>
           <a:xfrm>
-            <a:off x="8203996" y="4526280"/>
+            <a:off x="8203996" y="4709160"/>
             <a:ext cx="3210458" cy="1417319"/>
           </a:xfrm>
           <a:prstGeom prst="rect">
@@ -4814,7 +4993,7 @@
             <a:r>
               <a:rPr sz="1600" b="0" i="0">
                 <a:solidFill>
-                  <a:srgbClr val="2B2B2B"/>
+                  <a:srgbClr val="26231F"/>
                 </a:solidFill>
               </a:rPr>
               <a:t>내용을 입력하세요</a:t>
@@ -4829,7 +5008,7 @@
             <a:r>
               <a:rPr sz="1600" b="0" i="0">
                 <a:solidFill>
-                  <a:srgbClr val="2B2B2B"/>
+                  <a:srgbClr val="26231F"/>
                 </a:solidFill>
               </a:rPr>
               <a:t>내용을 입력하세요</a:t>
@@ -4871,14 +5050,14 @@
         </p:nvSpPr>
         <p:spPr>
           <a:xfrm>
-            <a:off x="9905695" y="-1463040"/>
-            <a:ext cx="3840480" cy="3840480"/>
-          </a:xfrm>
-          <a:prstGeom prst="ellipse">
+            <a:off x="0" y="6565392"/>
+            <a:ext cx="12191695" cy="292608"/>
+          </a:xfrm>
+          <a:prstGeom prst="rect">
             <a:avLst/>
           </a:prstGeom>
           <a:solidFill>
-            <a:srgbClr val="D2EFDC"/>
+            <a:srgbClr val="ADEBC2"/>
           </a:solidFill>
           <a:ln>
             <a:noFill/>
@@ -4894,20 +5073,20 @@
       </p:sp>
       <p:sp>
         <p:nvSpPr>
-          <p:cNvPr id="4" name="장식"/>
+          <p:cNvPr id="4" name="포인트"/>
           <p:cNvSpPr/>
           <p:nvPr/>
         </p:nvSpPr>
         <p:spPr>
           <a:xfrm>
-            <a:off x="11094415" y="274320"/>
-            <a:ext cx="411480" cy="411480"/>
-          </a:xfrm>
-          <a:prstGeom prst="ellipse">
+            <a:off x="5958687" y="246888"/>
+            <a:ext cx="274320" cy="274320"/>
+          </a:xfrm>
+          <a:prstGeom prst="sun">
             <a:avLst/>
           </a:prstGeom>
           <a:solidFill>
-            <a:srgbClr val="29653D"/>
+            <a:srgbClr val="98E1B1"/>
           </a:solidFill>
           <a:ln>
             <a:noFill/>
@@ -4918,6 +5097,73 @@
           <a:lstStyle/>
           <a:p>
             <a:pPr algn="ctr"/>
+          </a:p>
+        </p:txBody>
+      </p:sp>
+      <p:sp>
+        <p:nvSpPr>
+          <p:cNvPr id="5" name="장식"/>
+          <p:cNvSpPr/>
+          <p:nvPr/>
+        </p:nvSpPr>
+        <p:spPr>
+          <a:xfrm>
+            <a:off x="5684367" y="1572768"/>
+            <a:ext cx="822960" cy="22860"/>
+          </a:xfrm>
+          <a:prstGeom prst="rect">
+            <a:avLst/>
+          </a:prstGeom>
+          <a:solidFill>
+            <a:srgbClr val="98E1B1"/>
+          </a:solidFill>
+          <a:ln>
+            <a:noFill/>
+          </a:ln>
+        </p:spPr>
+        <p:txBody>
+          <a:bodyPr rtlCol="0" anchor="ctr"/>
+          <a:lstStyle/>
+          <a:p>
+            <a:pPr algn="ctr"/>
+          </a:p>
+        </p:txBody>
+      </p:sp>
+      <p:sp>
+        <p:nvSpPr>
+          <p:cNvPr id="6" name="상단 라벨"/>
+          <p:cNvSpPr txBox="1"/>
+          <p:nvPr/>
+        </p:nvSpPr>
+        <p:spPr>
+          <a:xfrm>
+            <a:off x="640080" y="182880"/>
+            <a:ext cx="3657600" cy="274320"/>
+          </a:xfrm>
+          <a:prstGeom prst="rect">
+            <a:avLst/>
+          </a:prstGeom>
+          <a:noFill/>
+        </p:spPr>
+        <p:txBody>
+          <a:bodyPr wrap="square" lIns="54864" rIns="54864" tIns="27432" bIns="27432" anchor="ctr">
+            <a:noAutofit/>
+          </a:bodyPr>
+          <a:lstStyle/>
+          <a:p>
+            <a:pPr algn="l">
+              <a:lnSpc>
+                <a:spcPct val="115000"/>
+              </a:lnSpc>
+            </a:pPr>
+            <a:r>
+              <a:rPr sz="800" b="1" i="0" spc="250">
+                <a:solidFill>
+                  <a:srgbClr val="8E8780"/>
+                </a:solidFill>
+              </a:rPr>
+              <a:t>PRESENTATION</a:t>
+            </a:r>
           </a:p>
         </p:txBody>
       </p:sp>
@@ -4933,8 +5179,8 @@
         </p:nvSpPr>
         <p:spPr>
           <a:xfrm>
-            <a:off x="640080" y="457200"/>
-            <a:ext cx="9722815" cy="868680"/>
+            <a:off x="1371600" y="640080"/>
+            <a:ext cx="9448495" cy="868680"/>
           </a:xfrm>
         </p:spPr>
         <p:txBody>
@@ -4943,7 +5189,7 @@
           </a:bodyPr>
           <a:lstStyle/>
           <a:p>
-            <a:pPr algn="l">
+            <a:pPr algn="ctr">
               <a:lnSpc>
                 <a:spcPct val="105000"/>
               </a:lnSpc>
@@ -4951,7 +5197,7 @@
             <a:r>
               <a:rPr sz="3000" b="1" i="0">
                 <a:solidFill>
-                  <a:srgbClr val="183A23"/>
+                  <a:srgbClr val="26231F"/>
                 </a:solidFill>
               </a:rPr>
               <a:t>한눈에 비교</a:t>
@@ -4961,26 +5207,26 @@
       </p:sp>
       <p:sp>
         <p:nvSpPr>
-          <p:cNvPr id="5" name="왼쪽 칸"/>
+          <p:cNvPr id="7" name="왼쪽 칸"/>
           <p:cNvSpPr/>
           <p:nvPr/>
         </p:nvSpPr>
         <p:spPr>
           <a:xfrm>
-            <a:off x="640080" y="1600200"/>
-            <a:ext cx="5272887" cy="4800600"/>
+            <a:off x="640080" y="1783080"/>
+            <a:ext cx="5272887" cy="3291840"/>
           </a:xfrm>
           <a:prstGeom prst="roundRect">
             <a:avLst>
-              <a:gd name="adj" fmla="val 8000"/>
+              <a:gd name="adj" fmla="val 7000"/>
             </a:avLst>
           </a:prstGeom>
           <a:solidFill>
-            <a:srgbClr val="F1F9F3"/>
+            <a:srgbClr val="FFFFFF"/>
           </a:solidFill>
           <a:ln w="12700">
             <a:solidFill>
-              <a:srgbClr val="D2EFDC"/>
+              <a:srgbClr val="ADEBC2"/>
             </a:solidFill>
           </a:ln>
         </p:spPr>
@@ -4994,13 +5240,13 @@
       </p:sp>
       <p:sp>
         <p:nvSpPr>
-          <p:cNvPr id="6" name="칸 제목 바"/>
+          <p:cNvPr id="8" name="칸 제목 바"/>
           <p:cNvSpPr/>
           <p:nvPr/>
         </p:nvSpPr>
         <p:spPr>
           <a:xfrm>
-            <a:off x="640080" y="1600200"/>
+            <a:off x="640080" y="1783080"/>
             <a:ext cx="5272887" cy="640080"/>
           </a:xfrm>
           <a:prstGeom prst="roundRect">
@@ -5009,7 +5255,7 @@
             </a:avLst>
           </a:prstGeom>
           <a:solidFill>
-            <a:srgbClr val="29653D"/>
+            <a:srgbClr val="98E1B1"/>
           </a:solidFill>
           <a:ln>
             <a:noFill/>
@@ -5025,13 +5271,13 @@
       </p:sp>
       <p:sp>
         <p:nvSpPr>
-          <p:cNvPr id="7" name="TextBox 6"/>
+          <p:cNvPr id="9" name="TextBox 8"/>
           <p:cNvSpPr txBox="1"/>
           <p:nvPr/>
         </p:nvSpPr>
         <p:spPr>
           <a:xfrm>
-            <a:off x="822959" y="1600200"/>
+            <a:off x="822959" y="1783080"/>
             <a:ext cx="4907127" cy="640080"/>
           </a:xfrm>
           <a:prstGeom prst="rect">
@@ -5053,7 +5299,7 @@
             <a:r>
               <a:rPr sz="1800" b="1" i="0">
                 <a:solidFill>
-                  <a:srgbClr val="FFFFFF"/>
+                  <a:srgbClr val="26231F"/>
                 </a:solidFill>
               </a:rPr>
               <a:t>알기 전</a:t>
@@ -5063,14 +5309,14 @@
       </p:sp>
       <p:sp>
         <p:nvSpPr>
-          <p:cNvPr id="8" name="TextBox 7"/>
+          <p:cNvPr id="10" name="TextBox 9"/>
           <p:cNvSpPr txBox="1"/>
           <p:nvPr/>
         </p:nvSpPr>
         <p:spPr>
           <a:xfrm>
-            <a:off x="868680" y="2423160"/>
-            <a:ext cx="4815687" cy="3886200"/>
+            <a:off x="868680" y="2606040"/>
+            <a:ext cx="4815687" cy="2377440"/>
           </a:xfrm>
           <a:prstGeom prst="rect">
             <a:avLst/>
@@ -5096,7 +5342,7 @@
             <a:r>
               <a:rPr sz="1500" b="0" i="0">
                 <a:solidFill>
-                  <a:srgbClr val="2B2B2B"/>
+                  <a:srgbClr val="26231F"/>
                 </a:solidFill>
               </a:rPr>
               <a:t>내용을 입력하세요</a:t>
@@ -5116,7 +5362,7 @@
             <a:r>
               <a:rPr sz="1500" b="0" i="0">
                 <a:solidFill>
-                  <a:srgbClr val="2B2B2B"/>
+                  <a:srgbClr val="26231F"/>
                 </a:solidFill>
               </a:rPr>
               <a:t>내용을 입력하세요</a:t>
@@ -5136,7 +5382,7 @@
             <a:r>
               <a:rPr sz="1500" b="0" i="0">
                 <a:solidFill>
-                  <a:srgbClr val="2B2B2B"/>
+                  <a:srgbClr val="26231F"/>
                 </a:solidFill>
               </a:rPr>
               <a:t>내용을 입력하세요</a:t>
@@ -5146,26 +5392,26 @@
       </p:sp>
       <p:sp>
         <p:nvSpPr>
-          <p:cNvPr id="9" name="오른쪽 칸"/>
+          <p:cNvPr id="11" name="오른쪽 칸"/>
           <p:cNvSpPr/>
           <p:nvPr/>
         </p:nvSpPr>
         <p:spPr>
           <a:xfrm>
-            <a:off x="6278727" y="1600200"/>
-            <a:ext cx="5272887" cy="4800600"/>
+            <a:off x="6278727" y="1783080"/>
+            <a:ext cx="5272887" cy="3291840"/>
           </a:xfrm>
           <a:prstGeom prst="roundRect">
             <a:avLst>
-              <a:gd name="adj" fmla="val 8000"/>
+              <a:gd name="adj" fmla="val 7000"/>
             </a:avLst>
           </a:prstGeom>
           <a:solidFill>
-            <a:srgbClr val="D2EFDC"/>
+            <a:srgbClr val="FFFFFF"/>
           </a:solidFill>
           <a:ln w="12700">
             <a:solidFill>
-              <a:srgbClr val="D2EFDC"/>
+              <a:srgbClr val="ADEBC2"/>
             </a:solidFill>
           </a:ln>
         </p:spPr>
@@ -5179,13 +5425,13 @@
       </p:sp>
       <p:sp>
         <p:nvSpPr>
-          <p:cNvPr id="10" name="칸 제목 바"/>
+          <p:cNvPr id="12" name="칸 제목 바"/>
           <p:cNvSpPr/>
           <p:nvPr/>
         </p:nvSpPr>
         <p:spPr>
           <a:xfrm>
-            <a:off x="6278727" y="1600200"/>
+            <a:off x="6278727" y="1783080"/>
             <a:ext cx="5272887" cy="640080"/>
           </a:xfrm>
           <a:prstGeom prst="roundRect">
@@ -5194,7 +5440,7 @@
             </a:avLst>
           </a:prstGeom>
           <a:solidFill>
-            <a:srgbClr val="183A23"/>
+            <a:srgbClr val="274932"/>
           </a:solidFill>
           <a:ln>
             <a:noFill/>
@@ -5210,13 +5456,13 @@
       </p:sp>
       <p:sp>
         <p:nvSpPr>
-          <p:cNvPr id="11" name="TextBox 10"/>
+          <p:cNvPr id="13" name="TextBox 12"/>
           <p:cNvSpPr txBox="1"/>
           <p:nvPr/>
         </p:nvSpPr>
         <p:spPr>
           <a:xfrm>
-            <a:off x="6461607" y="1600200"/>
+            <a:off x="6461607" y="1783080"/>
             <a:ext cx="4907127" cy="640080"/>
           </a:xfrm>
           <a:prstGeom prst="rect">
@@ -5248,14 +5494,14 @@
       </p:sp>
       <p:sp>
         <p:nvSpPr>
-          <p:cNvPr id="12" name="TextBox 11"/>
+          <p:cNvPr id="14" name="TextBox 13"/>
           <p:cNvSpPr txBox="1"/>
           <p:nvPr/>
         </p:nvSpPr>
         <p:spPr>
           <a:xfrm>
-            <a:off x="6507327" y="2423160"/>
-            <a:ext cx="4815687" cy="3886200"/>
+            <a:off x="6507327" y="2606040"/>
+            <a:ext cx="4815687" cy="2377440"/>
           </a:xfrm>
           <a:prstGeom prst="rect">
             <a:avLst/>
@@ -5281,7 +5527,7 @@
             <a:r>
               <a:rPr sz="1500" b="0" i="0">
                 <a:solidFill>
-                  <a:srgbClr val="2B2B2B"/>
+                  <a:srgbClr val="26231F"/>
                 </a:solidFill>
               </a:rPr>
               <a:t>내용을 입력하세요</a:t>
@@ -5301,7 +5547,7 @@
             <a:r>
               <a:rPr sz="1500" b="0" i="0">
                 <a:solidFill>
-                  <a:srgbClr val="2B2B2B"/>
+                  <a:srgbClr val="26231F"/>
                 </a:solidFill>
               </a:rPr>
               <a:t>내용을 입력하세요</a:t>
@@ -5321,7 +5567,7 @@
             <a:r>
               <a:rPr sz="1500" b="0" i="0">
                 <a:solidFill>
-                  <a:srgbClr val="2B2B2B"/>
+                  <a:srgbClr val="26231F"/>
                 </a:solidFill>
               </a:rPr>
               <a:t>내용을 입력하세요</a:t>
@@ -5363,14 +5609,14 @@
         </p:nvSpPr>
         <p:spPr>
           <a:xfrm>
-            <a:off x="9905695" y="-1463040"/>
-            <a:ext cx="3840480" cy="3840480"/>
-          </a:xfrm>
-          <a:prstGeom prst="ellipse">
+            <a:off x="0" y="6565392"/>
+            <a:ext cx="12191695" cy="292608"/>
+          </a:xfrm>
+          <a:prstGeom prst="rect">
             <a:avLst/>
           </a:prstGeom>
           <a:solidFill>
-            <a:srgbClr val="D2EFDC"/>
+            <a:srgbClr val="ADEBC2"/>
           </a:solidFill>
           <a:ln>
             <a:noFill/>
@@ -5386,20 +5632,20 @@
       </p:sp>
       <p:sp>
         <p:nvSpPr>
-          <p:cNvPr id="4" name="장식"/>
+          <p:cNvPr id="4" name="포인트"/>
           <p:cNvSpPr/>
           <p:nvPr/>
         </p:nvSpPr>
         <p:spPr>
           <a:xfrm>
-            <a:off x="11094415" y="274320"/>
-            <a:ext cx="411480" cy="411480"/>
-          </a:xfrm>
-          <a:prstGeom prst="ellipse">
+            <a:off x="5958687" y="246888"/>
+            <a:ext cx="274320" cy="274320"/>
+          </a:xfrm>
+          <a:prstGeom prst="sun">
             <a:avLst/>
           </a:prstGeom>
           <a:solidFill>
-            <a:srgbClr val="29653D"/>
+            <a:srgbClr val="98E1B1"/>
           </a:solidFill>
           <a:ln>
             <a:noFill/>
@@ -5410,6 +5656,73 @@
           <a:lstStyle/>
           <a:p>
             <a:pPr algn="ctr"/>
+          </a:p>
+        </p:txBody>
+      </p:sp>
+      <p:sp>
+        <p:nvSpPr>
+          <p:cNvPr id="5" name="장식"/>
+          <p:cNvSpPr/>
+          <p:nvPr/>
+        </p:nvSpPr>
+        <p:spPr>
+          <a:xfrm>
+            <a:off x="5684367" y="1572768"/>
+            <a:ext cx="822960" cy="22860"/>
+          </a:xfrm>
+          <a:prstGeom prst="rect">
+            <a:avLst/>
+          </a:prstGeom>
+          <a:solidFill>
+            <a:srgbClr val="98E1B1"/>
+          </a:solidFill>
+          <a:ln>
+            <a:noFill/>
+          </a:ln>
+        </p:spPr>
+        <p:txBody>
+          <a:bodyPr rtlCol="0" anchor="ctr"/>
+          <a:lstStyle/>
+          <a:p>
+            <a:pPr algn="ctr"/>
+          </a:p>
+        </p:txBody>
+      </p:sp>
+      <p:sp>
+        <p:nvSpPr>
+          <p:cNvPr id="6" name="상단 라벨"/>
+          <p:cNvSpPr txBox="1"/>
+          <p:nvPr/>
+        </p:nvSpPr>
+        <p:spPr>
+          <a:xfrm>
+            <a:off x="640080" y="182880"/>
+            <a:ext cx="3657600" cy="274320"/>
+          </a:xfrm>
+          <a:prstGeom prst="rect">
+            <a:avLst/>
+          </a:prstGeom>
+          <a:noFill/>
+        </p:spPr>
+        <p:txBody>
+          <a:bodyPr wrap="square" lIns="54864" rIns="54864" tIns="27432" bIns="27432" anchor="ctr">
+            <a:noAutofit/>
+          </a:bodyPr>
+          <a:lstStyle/>
+          <a:p>
+            <a:pPr algn="l">
+              <a:lnSpc>
+                <a:spcPct val="115000"/>
+              </a:lnSpc>
+            </a:pPr>
+            <a:r>
+              <a:rPr sz="800" b="1" i="0" spc="250">
+                <a:solidFill>
+                  <a:srgbClr val="8E8780"/>
+                </a:solidFill>
+              </a:rPr>
+              <a:t>PRESENTATION</a:t>
+            </a:r>
           </a:p>
         </p:txBody>
       </p:sp>
@@ -5425,8 +5738,8 @@
         </p:nvSpPr>
         <p:spPr>
           <a:xfrm>
-            <a:off x="640080" y="457200"/>
-            <a:ext cx="9722815" cy="868680"/>
+            <a:off x="1371600" y="640080"/>
+            <a:ext cx="9448495" cy="868680"/>
           </a:xfrm>
         </p:spPr>
         <p:txBody>
@@ -5435,7 +5748,7 @@
           </a:bodyPr>
           <a:lstStyle/>
           <a:p>
-            <a:pPr algn="l">
+            <a:pPr algn="ctr">
               <a:lnSpc>
                 <a:spcPct val="105000"/>
               </a:lnSpc>
@@ -5443,7 +5756,7 @@
             <a:r>
               <a:rPr sz="3000" b="1" i="0">
                 <a:solidFill>
-                  <a:srgbClr val="183A23"/>
+                  <a:srgbClr val="26231F"/>
                 </a:solidFill>
               </a:rPr>
               <a:t>일정·현황</a:t>
@@ -5453,14 +5766,14 @@
       </p:sp>
       <p:graphicFrame>
         <p:nvGraphicFramePr>
-          <p:cNvPr id="5" name="표"/>
+          <p:cNvPr id="7" name="표"/>
           <p:cNvGraphicFramePr>
             <a:graphicFrameLocks noGrp="1"/>
           </p:cNvGraphicFramePr>
           <p:nvPr/>
         </p:nvGraphicFramePr>
         <p:xfrm>
-          <a:off x="640080" y="1600200"/>
+          <a:off x="640080" y="1783080"/>
           <a:ext cx="10911532" cy="3840480"/>
         </p:xfrm>
         <a:graphic>
@@ -5485,7 +5798,7 @@
                       <a:r>
                         <a:rPr sz="1500" b="1">
                           <a:solidFill>
-                            <a:srgbClr val="FFFFFF"/>
+                            <a:srgbClr val="26231F"/>
                           </a:solidFill>
                         </a:rPr>
                         <a:t>차시</a:t>
@@ -5495,30 +5808,30 @@
                   <a:tcPr anchor="ctr" marL="73152" marR="73152">
                     <a:lnL w="9525" cap="flat" cmpd="sng" algn="ctr">
                       <a:solidFill>
-                        <a:srgbClr val="29653D"/>
+                        <a:srgbClr val="98E1B1"/>
                       </a:solidFill>
                       <a:prstDash val="solid"/>
                     </a:lnL>
                     <a:lnR w="9525" cap="flat" cmpd="sng" algn="ctr">
                       <a:solidFill>
-                        <a:srgbClr val="29653D"/>
+                        <a:srgbClr val="98E1B1"/>
                       </a:solidFill>
                       <a:prstDash val="solid"/>
                     </a:lnR>
                     <a:lnT w="9525" cap="flat" cmpd="sng" algn="ctr">
                       <a:solidFill>
-                        <a:srgbClr val="29653D"/>
+                        <a:srgbClr val="98E1B1"/>
                       </a:solidFill>
                       <a:prstDash val="solid"/>
                     </a:lnT>
                     <a:lnB w="9525" cap="flat" cmpd="sng" algn="ctr">
                       <a:solidFill>
-                        <a:srgbClr val="29653D"/>
+                        <a:srgbClr val="98E1B1"/>
                       </a:solidFill>
                       <a:prstDash val="solid"/>
                     </a:lnB>
                     <a:solidFill>
-                      <a:srgbClr val="29653D"/>
+                      <a:srgbClr val="98E1B1"/>
                     </a:solidFill>
                   </a:tcPr>
                 </a:tc>
@@ -5531,7 +5844,7 @@
                       <a:r>
                         <a:rPr sz="1500" b="1">
                           <a:solidFill>
-                            <a:srgbClr val="FFFFFF"/>
+                            <a:srgbClr val="26231F"/>
                           </a:solidFill>
                         </a:rPr>
                         <a:t>주제</a:t>
@@ -5541,30 +5854,30 @@
                   <a:tcPr anchor="ctr" marL="73152" marR="73152">
                     <a:lnL w="9525" cap="flat" cmpd="sng" algn="ctr">
                       <a:solidFill>
-                        <a:srgbClr val="29653D"/>
+                        <a:srgbClr val="98E1B1"/>
                       </a:solidFill>
                       <a:prstDash val="solid"/>
                     </a:lnL>
                     <a:lnR w="9525" cap="flat" cmpd="sng" algn="ctr">
                       <a:solidFill>
-                        <a:srgbClr val="29653D"/>
+                        <a:srgbClr val="98E1B1"/>
                       </a:solidFill>
                       <a:prstDash val="solid"/>
                     </a:lnR>
                     <a:lnT w="9525" cap="flat" cmpd="sng" algn="ctr">
                       <a:solidFill>
-                        <a:srgbClr val="29653D"/>
+                        <a:srgbClr val="98E1B1"/>
                       </a:solidFill>
                       <a:prstDash val="solid"/>
                     </a:lnT>
                     <a:lnB w="9525" cap="flat" cmpd="sng" algn="ctr">
                       <a:solidFill>
-                        <a:srgbClr val="29653D"/>
+                        <a:srgbClr val="98E1B1"/>
                       </a:solidFill>
                       <a:prstDash val="solid"/>
                     </a:lnB>
                     <a:solidFill>
-                      <a:srgbClr val="29653D"/>
+                      <a:srgbClr val="98E1B1"/>
                     </a:solidFill>
                   </a:tcPr>
                 </a:tc>
@@ -5577,7 +5890,7 @@
                       <a:r>
                         <a:rPr sz="1500" b="1">
                           <a:solidFill>
-                            <a:srgbClr val="FFFFFF"/>
+                            <a:srgbClr val="26231F"/>
                           </a:solidFill>
                         </a:rPr>
                         <a:t>시간</a:t>
@@ -5587,30 +5900,30 @@
                   <a:tcPr anchor="ctr" marL="73152" marR="73152">
                     <a:lnL w="9525" cap="flat" cmpd="sng" algn="ctr">
                       <a:solidFill>
-                        <a:srgbClr val="29653D"/>
+                        <a:srgbClr val="98E1B1"/>
                       </a:solidFill>
                       <a:prstDash val="solid"/>
                     </a:lnL>
                     <a:lnR w="9525" cap="flat" cmpd="sng" algn="ctr">
                       <a:solidFill>
-                        <a:srgbClr val="29653D"/>
+                        <a:srgbClr val="98E1B1"/>
                       </a:solidFill>
                       <a:prstDash val="solid"/>
                     </a:lnR>
                     <a:lnT w="9525" cap="flat" cmpd="sng" algn="ctr">
                       <a:solidFill>
-                        <a:srgbClr val="29653D"/>
+                        <a:srgbClr val="98E1B1"/>
                       </a:solidFill>
                       <a:prstDash val="solid"/>
                     </a:lnT>
                     <a:lnB w="9525" cap="flat" cmpd="sng" algn="ctr">
                       <a:solidFill>
-                        <a:srgbClr val="29653D"/>
+                        <a:srgbClr val="98E1B1"/>
                       </a:solidFill>
                       <a:prstDash val="solid"/>
                     </a:lnB>
                     <a:solidFill>
-                      <a:srgbClr val="29653D"/>
+                      <a:srgbClr val="98E1B1"/>
                     </a:solidFill>
                   </a:tcPr>
                 </a:tc>
@@ -5623,7 +5936,7 @@
                       <a:r>
                         <a:rPr sz="1500" b="1">
                           <a:solidFill>
-                            <a:srgbClr val="FFFFFF"/>
+                            <a:srgbClr val="26231F"/>
                           </a:solidFill>
                         </a:rPr>
                         <a:t>준비물</a:t>
@@ -5633,30 +5946,30 @@
                   <a:tcPr anchor="ctr" marL="73152" marR="73152">
                     <a:lnL w="9525" cap="flat" cmpd="sng" algn="ctr">
                       <a:solidFill>
-                        <a:srgbClr val="29653D"/>
+                        <a:srgbClr val="98E1B1"/>
                       </a:solidFill>
                       <a:prstDash val="solid"/>
                     </a:lnL>
                     <a:lnR w="9525" cap="flat" cmpd="sng" algn="ctr">
                       <a:solidFill>
-                        <a:srgbClr val="29653D"/>
+                        <a:srgbClr val="98E1B1"/>
                       </a:solidFill>
                       <a:prstDash val="solid"/>
                     </a:lnR>
                     <a:lnT w="9525" cap="flat" cmpd="sng" algn="ctr">
                       <a:solidFill>
-                        <a:srgbClr val="29653D"/>
+                        <a:srgbClr val="98E1B1"/>
                       </a:solidFill>
                       <a:prstDash val="solid"/>
                     </a:lnT>
                     <a:lnB w="9525" cap="flat" cmpd="sng" algn="ctr">
                       <a:solidFill>
-                        <a:srgbClr val="29653D"/>
+                        <a:srgbClr val="98E1B1"/>
                       </a:solidFill>
                       <a:prstDash val="solid"/>
                     </a:lnB>
                     <a:solidFill>
-                      <a:srgbClr val="29653D"/>
+                      <a:srgbClr val="98E1B1"/>
                     </a:solidFill>
                   </a:tcPr>
                 </a:tc>
@@ -5671,7 +5984,7 @@
                       <a:r>
                         <a:rPr sz="1500" b="1">
                           <a:solidFill>
-                            <a:srgbClr val="183A23"/>
+                            <a:srgbClr val="274932"/>
                           </a:solidFill>
                         </a:rPr>
                         <a:t>1</a:t>
@@ -5681,30 +5994,30 @@
                   <a:tcPr anchor="ctr" marL="73152" marR="73152">
                     <a:lnL w="9525" cap="flat" cmpd="sng" algn="ctr">
                       <a:solidFill>
-                        <a:srgbClr val="D2EFDC"/>
+                        <a:srgbClr val="D5F6E0"/>
                       </a:solidFill>
                       <a:prstDash val="solid"/>
                     </a:lnL>
                     <a:lnR w="9525" cap="flat" cmpd="sng" algn="ctr">
                       <a:solidFill>
-                        <a:srgbClr val="D2EFDC"/>
+                        <a:srgbClr val="D5F6E0"/>
                       </a:solidFill>
                       <a:prstDash val="solid"/>
                     </a:lnR>
                     <a:lnT w="9525" cap="flat" cmpd="sng" algn="ctr">
                       <a:solidFill>
-                        <a:srgbClr val="D2EFDC"/>
+                        <a:srgbClr val="D5F6E0"/>
                       </a:solidFill>
                       <a:prstDash val="solid"/>
                     </a:lnT>
                     <a:lnB w="9525" cap="flat" cmpd="sng" algn="ctr">
                       <a:solidFill>
-                        <a:srgbClr val="D2EFDC"/>
+                        <a:srgbClr val="D5F6E0"/>
                       </a:solidFill>
                       <a:prstDash val="solid"/>
                     </a:lnB>
                     <a:solidFill>
-                      <a:srgbClr val="D2EFDC"/>
+                      <a:srgbClr val="D5F6E0"/>
                     </a:solidFill>
                   </a:tcPr>
                 </a:tc>
@@ -5717,7 +6030,7 @@
                       <a:r>
                         <a:rPr sz="1500" b="0">
                           <a:solidFill>
-                            <a:srgbClr val="2B2B2B"/>
+                            <a:srgbClr val="26231F"/>
                           </a:solidFill>
                         </a:rPr>
                         <a:t>내용 입력</a:t>
@@ -5727,25 +6040,25 @@
                   <a:tcPr anchor="ctr" marL="73152" marR="73152">
                     <a:lnL w="9525" cap="flat" cmpd="sng" algn="ctr">
                       <a:solidFill>
-                        <a:srgbClr val="D2EFDC"/>
+                        <a:srgbClr val="D5F6E0"/>
                       </a:solidFill>
                       <a:prstDash val="solid"/>
                     </a:lnL>
                     <a:lnR w="9525" cap="flat" cmpd="sng" algn="ctr">
                       <a:solidFill>
-                        <a:srgbClr val="D2EFDC"/>
+                        <a:srgbClr val="D5F6E0"/>
                       </a:solidFill>
                       <a:prstDash val="solid"/>
                     </a:lnR>
                     <a:lnT w="9525" cap="flat" cmpd="sng" algn="ctr">
                       <a:solidFill>
-                        <a:srgbClr val="D2EFDC"/>
+                        <a:srgbClr val="D5F6E0"/>
                       </a:solidFill>
                       <a:prstDash val="solid"/>
                     </a:lnT>
                     <a:lnB w="9525" cap="flat" cmpd="sng" algn="ctr">
                       <a:solidFill>
-                        <a:srgbClr val="D2EFDC"/>
+                        <a:srgbClr val="D5F6E0"/>
                       </a:solidFill>
                       <a:prstDash val="solid"/>
                     </a:lnB>
@@ -5763,7 +6076,7 @@
                       <a:r>
                         <a:rPr sz="1500" b="0">
                           <a:solidFill>
-                            <a:srgbClr val="2B2B2B"/>
+                            <a:srgbClr val="26231F"/>
                           </a:solidFill>
                         </a:rPr>
                         <a:t/>
@@ -5773,25 +6086,25 @@
                   <a:tcPr anchor="ctr" marL="73152" marR="73152">
                     <a:lnL w="9525" cap="flat" cmpd="sng" algn="ctr">
                       <a:solidFill>
-                        <a:srgbClr val="D2EFDC"/>
+                        <a:srgbClr val="D5F6E0"/>
                       </a:solidFill>
                       <a:prstDash val="solid"/>
                     </a:lnL>
                     <a:lnR w="9525" cap="flat" cmpd="sng" algn="ctr">
                       <a:solidFill>
-                        <a:srgbClr val="D2EFDC"/>
+                        <a:srgbClr val="D5F6E0"/>
                       </a:solidFill>
                       <a:prstDash val="solid"/>
                     </a:lnR>
                     <a:lnT w="9525" cap="flat" cmpd="sng" algn="ctr">
                       <a:solidFill>
-                        <a:srgbClr val="D2EFDC"/>
+                        <a:srgbClr val="D5F6E0"/>
                       </a:solidFill>
                       <a:prstDash val="solid"/>
                     </a:lnT>
                     <a:lnB w="9525" cap="flat" cmpd="sng" algn="ctr">
                       <a:solidFill>
-                        <a:srgbClr val="D2EFDC"/>
+                        <a:srgbClr val="D5F6E0"/>
                       </a:solidFill>
                       <a:prstDash val="solid"/>
                     </a:lnB>
@@ -5809,7 +6122,7 @@
                       <a:r>
                         <a:rPr sz="1500" b="0">
                           <a:solidFill>
-                            <a:srgbClr val="2B2B2B"/>
+                            <a:srgbClr val="26231F"/>
                           </a:solidFill>
                         </a:rPr>
                         <a:t/>
@@ -5819,25 +6132,25 @@
                   <a:tcPr anchor="ctr" marL="73152" marR="73152">
                     <a:lnL w="9525" cap="flat" cmpd="sng" algn="ctr">
                       <a:solidFill>
-                        <a:srgbClr val="D2EFDC"/>
+                        <a:srgbClr val="D5F6E0"/>
                       </a:solidFill>
                       <a:prstDash val="solid"/>
                     </a:lnL>
                     <a:lnR w="9525" cap="flat" cmpd="sng" algn="ctr">
                       <a:solidFill>
-                        <a:srgbClr val="D2EFDC"/>
+                        <a:srgbClr val="D5F6E0"/>
                       </a:solidFill>
                       <a:prstDash val="solid"/>
                     </a:lnR>
                     <a:lnT w="9525" cap="flat" cmpd="sng" algn="ctr">
                       <a:solidFill>
-                        <a:srgbClr val="D2EFDC"/>
+                        <a:srgbClr val="D5F6E0"/>
                       </a:solidFill>
                       <a:prstDash val="solid"/>
                     </a:lnT>
                     <a:lnB w="9525" cap="flat" cmpd="sng" algn="ctr">
                       <a:solidFill>
-                        <a:srgbClr val="D2EFDC"/>
+                        <a:srgbClr val="D5F6E0"/>
                       </a:solidFill>
                       <a:prstDash val="solid"/>
                     </a:lnB>
@@ -5857,7 +6170,7 @@
                       <a:r>
                         <a:rPr sz="1500" b="1">
                           <a:solidFill>
-                            <a:srgbClr val="183A23"/>
+                            <a:srgbClr val="274932"/>
                           </a:solidFill>
                         </a:rPr>
                         <a:t>2</a:t>
@@ -5867,30 +6180,30 @@
                   <a:tcPr anchor="ctr" marL="73152" marR="73152">
                     <a:lnL w="9525" cap="flat" cmpd="sng" algn="ctr">
                       <a:solidFill>
-                        <a:srgbClr val="D2EFDC"/>
+                        <a:srgbClr val="D5F6E0"/>
                       </a:solidFill>
                       <a:prstDash val="solid"/>
                     </a:lnL>
                     <a:lnR w="9525" cap="flat" cmpd="sng" algn="ctr">
                       <a:solidFill>
-                        <a:srgbClr val="D2EFDC"/>
+                        <a:srgbClr val="D5F6E0"/>
                       </a:solidFill>
                       <a:prstDash val="solid"/>
                     </a:lnR>
                     <a:lnT w="9525" cap="flat" cmpd="sng" algn="ctr">
                       <a:solidFill>
-                        <a:srgbClr val="D2EFDC"/>
+                        <a:srgbClr val="D5F6E0"/>
                       </a:solidFill>
                       <a:prstDash val="solid"/>
                     </a:lnT>
                     <a:lnB w="9525" cap="flat" cmpd="sng" algn="ctr">
                       <a:solidFill>
-                        <a:srgbClr val="D2EFDC"/>
+                        <a:srgbClr val="D5F6E0"/>
                       </a:solidFill>
                       <a:prstDash val="solid"/>
                     </a:lnB>
                     <a:solidFill>
-                      <a:srgbClr val="D2EFDC"/>
+                      <a:srgbClr val="D5F6E0"/>
                     </a:solidFill>
                   </a:tcPr>
                 </a:tc>
@@ -5903,7 +6216,7 @@
                       <a:r>
                         <a:rPr sz="1500" b="0">
                           <a:solidFill>
-                            <a:srgbClr val="2B2B2B"/>
+                            <a:srgbClr val="26231F"/>
                           </a:solidFill>
                         </a:rPr>
                         <a:t>내용 입력</a:t>
@@ -5913,30 +6226,30 @@
                   <a:tcPr anchor="ctr" marL="73152" marR="73152">
                     <a:lnL w="9525" cap="flat" cmpd="sng" algn="ctr">
                       <a:solidFill>
-                        <a:srgbClr val="D2EFDC"/>
+                        <a:srgbClr val="D5F6E0"/>
                       </a:solidFill>
                       <a:prstDash val="solid"/>
                     </a:lnL>
                     <a:lnR w="9525" cap="flat" cmpd="sng" algn="ctr">
                       <a:solidFill>
-                        <a:srgbClr val="D2EFDC"/>
+                        <a:srgbClr val="D5F6E0"/>
                       </a:solidFill>
                       <a:prstDash val="solid"/>
                     </a:lnR>
                     <a:lnT w="9525" cap="flat" cmpd="sng" algn="ctr">
                       <a:solidFill>
-                        <a:srgbClr val="D2EFDC"/>
+                        <a:srgbClr val="D5F6E0"/>
                       </a:solidFill>
                       <a:prstDash val="solid"/>
                     </a:lnT>
                     <a:lnB w="9525" cap="flat" cmpd="sng" algn="ctr">
                       <a:solidFill>
-                        <a:srgbClr val="D2EFDC"/>
+                        <a:srgbClr val="D5F6E0"/>
                       </a:solidFill>
                       <a:prstDash val="solid"/>
                     </a:lnB>
                     <a:solidFill>
-                      <a:srgbClr val="F1F9F3"/>
+                      <a:srgbClr val="ECFBF1"/>
                     </a:solidFill>
                   </a:tcPr>
                 </a:tc>
@@ -5949,7 +6262,7 @@
                       <a:r>
                         <a:rPr sz="1500" b="0">
                           <a:solidFill>
-                            <a:srgbClr val="2B2B2B"/>
+                            <a:srgbClr val="26231F"/>
                           </a:solidFill>
                         </a:rPr>
                         <a:t/>
@@ -5959,30 +6272,30 @@
                   <a:tcPr anchor="ctr" marL="73152" marR="73152">
                     <a:lnL w="9525" cap="flat" cmpd="sng" algn="ctr">
                       <a:solidFill>
-                        <a:srgbClr val="D2EFDC"/>
+                        <a:srgbClr val="D5F6E0"/>
                       </a:solidFill>
                       <a:prstDash val="solid"/>
                     </a:lnL>
                     <a:lnR w="9525" cap="flat" cmpd="sng" algn="ctr">
                       <a:solidFill>
-                        <a:srgbClr val="D2EFDC"/>
+                        <a:srgbClr val="D5F6E0"/>
                       </a:solidFill>
                       <a:prstDash val="solid"/>
                     </a:lnR>
                     <a:lnT w="9525" cap="flat" cmpd="sng" algn="ctr">
                       <a:solidFill>
-                        <a:srgbClr val="D2EFDC"/>
+                        <a:srgbClr val="D5F6E0"/>
                       </a:solidFill>
                       <a:prstDash val="solid"/>
                     </a:lnT>
                     <a:lnB w="9525" cap="flat" cmpd="sng" algn="ctr">
                       <a:solidFill>
-                        <a:srgbClr val="D2EFDC"/>
+                        <a:srgbClr val="D5F6E0"/>
                       </a:solidFill>
                       <a:prstDash val="solid"/>
                     </a:lnB>
                     <a:solidFill>
-                      <a:srgbClr val="F1F9F3"/>
+                      <a:srgbClr val="ECFBF1"/>
                     </a:solidFill>
                   </a:tcPr>
                 </a:tc>
@@ -5995,7 +6308,7 @@
                       <a:r>
                         <a:rPr sz="1500" b="0">
                           <a:solidFill>
-                            <a:srgbClr val="2B2B2B"/>
+                            <a:srgbClr val="26231F"/>
                           </a:solidFill>
                         </a:rPr>
                         <a:t/>
@@ -6005,30 +6318,30 @@
                   <a:tcPr anchor="ctr" marL="73152" marR="73152">
                     <a:lnL w="9525" cap="flat" cmpd="sng" algn="ctr">
                       <a:solidFill>
-                        <a:srgbClr val="D2EFDC"/>
+                        <a:srgbClr val="D5F6E0"/>
                       </a:solidFill>
                       <a:prstDash val="solid"/>
                     </a:lnL>
                     <a:lnR w="9525" cap="flat" cmpd="sng" algn="ctr">
                       <a:solidFill>
-                        <a:srgbClr val="D2EFDC"/>
+                        <a:srgbClr val="D5F6E0"/>
                       </a:solidFill>
                       <a:prstDash val="solid"/>
                     </a:lnR>
                     <a:lnT w="9525" cap="flat" cmpd="sng" algn="ctr">
                       <a:solidFill>
-                        <a:srgbClr val="D2EFDC"/>
+                        <a:srgbClr val="D5F6E0"/>
                       </a:solidFill>
                       <a:prstDash val="solid"/>
                     </a:lnT>
                     <a:lnB w="9525" cap="flat" cmpd="sng" algn="ctr">
                       <a:solidFill>
-                        <a:srgbClr val="D2EFDC"/>
+                        <a:srgbClr val="D5F6E0"/>
                       </a:solidFill>
                       <a:prstDash val="solid"/>
                     </a:lnB>
                     <a:solidFill>
-                      <a:srgbClr val="F1F9F3"/>
+                      <a:srgbClr val="ECFBF1"/>
                     </a:solidFill>
                   </a:tcPr>
                 </a:tc>
@@ -6043,7 +6356,7 @@
                       <a:r>
                         <a:rPr sz="1500" b="1">
                           <a:solidFill>
-                            <a:srgbClr val="183A23"/>
+                            <a:srgbClr val="274932"/>
                           </a:solidFill>
                         </a:rPr>
                         <a:t>3</a:t>
@@ -6053,30 +6366,30 @@
                   <a:tcPr anchor="ctr" marL="73152" marR="73152">
                     <a:lnL w="9525" cap="flat" cmpd="sng" algn="ctr">
                       <a:solidFill>
-                        <a:srgbClr val="D2EFDC"/>
+                        <a:srgbClr val="D5F6E0"/>
                       </a:solidFill>
                       <a:prstDash val="solid"/>
                     </a:lnL>
                     <a:lnR w="9525" cap="flat" cmpd="sng" algn="ctr">
                       <a:solidFill>
-                        <a:srgbClr val="D2EFDC"/>
+                        <a:srgbClr val="D5F6E0"/>
                       </a:solidFill>
                       <a:prstDash val="solid"/>
                     </a:lnR>
                     <a:lnT w="9525" cap="flat" cmpd="sng" algn="ctr">
                       <a:solidFill>
-                        <a:srgbClr val="D2EFDC"/>
+                        <a:srgbClr val="D5F6E0"/>
                       </a:solidFill>
                       <a:prstDash val="solid"/>
                     </a:lnT>
                     <a:lnB w="9525" cap="flat" cmpd="sng" algn="ctr">
                       <a:solidFill>
-                        <a:srgbClr val="D2EFDC"/>
+                        <a:srgbClr val="D5F6E0"/>
                       </a:solidFill>
                       <a:prstDash val="solid"/>
                     </a:lnB>
                     <a:solidFill>
-                      <a:srgbClr val="D2EFDC"/>
+                      <a:srgbClr val="D5F6E0"/>
                     </a:solidFill>
                   </a:tcPr>
                 </a:tc>
@@ -6089,7 +6402,7 @@
                       <a:r>
                         <a:rPr sz="1500" b="0">
                           <a:solidFill>
-                            <a:srgbClr val="2B2B2B"/>
+                            <a:srgbClr val="26231F"/>
                           </a:solidFill>
                         </a:rPr>
                         <a:t>내용 입력</a:t>
@@ -6099,25 +6412,25 @@
                   <a:tcPr anchor="ctr" marL="73152" marR="73152">
                     <a:lnL w="9525" cap="flat" cmpd="sng" algn="ctr">
                       <a:solidFill>
-                        <a:srgbClr val="D2EFDC"/>
+                        <a:srgbClr val="D5F6E0"/>
                       </a:solidFill>
                       <a:prstDash val="solid"/>
                     </a:lnL>
                     <a:lnR w="9525" cap="flat" cmpd="sng" algn="ctr">
                       <a:solidFill>
-                        <a:srgbClr val="D2EFDC"/>
+                        <a:srgbClr val="D5F6E0"/>
                       </a:solidFill>
                       <a:prstDash val="solid"/>
                     </a:lnR>
                     <a:lnT w="9525" cap="flat" cmpd="sng" algn="ctr">
                       <a:solidFill>
-                        <a:srgbClr val="D2EFDC"/>
+                        <a:srgbClr val="D5F6E0"/>
                       </a:solidFill>
                       <a:prstDash val="solid"/>
                     </a:lnT>
                     <a:lnB w="9525" cap="flat" cmpd="sng" algn="ctr">
                       <a:solidFill>
-                        <a:srgbClr val="D2EFDC"/>
+                        <a:srgbClr val="D5F6E0"/>
                       </a:solidFill>
                       <a:prstDash val="solid"/>
                     </a:lnB>
@@ -6135,7 +6448,7 @@
                       <a:r>
                         <a:rPr sz="1500" b="0">
                           <a:solidFill>
-                            <a:srgbClr val="2B2B2B"/>
+                            <a:srgbClr val="26231F"/>
                           </a:solidFill>
                         </a:rPr>
                         <a:t/>
@@ -6145,25 +6458,25 @@
                   <a:tcPr anchor="ctr" marL="73152" marR="73152">
                     <a:lnL w="9525" cap="flat" cmpd="sng" algn="ctr">
                       <a:solidFill>
-                        <a:srgbClr val="D2EFDC"/>
+                        <a:srgbClr val="D5F6E0"/>
                       </a:solidFill>
                       <a:prstDash val="solid"/>
                     </a:lnL>
                     <a:lnR w="9525" cap="flat" cmpd="sng" algn="ctr">
                       <a:solidFill>
-                        <a:srgbClr val="D2EFDC"/>
+                        <a:srgbClr val="D5F6E0"/>
                       </a:solidFill>
                       <a:prstDash val="solid"/>
                     </a:lnR>
                     <a:lnT w="9525" cap="flat" cmpd="sng" algn="ctr">
                       <a:solidFill>
-                        <a:srgbClr val="D2EFDC"/>
+                        <a:srgbClr val="D5F6E0"/>
                       </a:solidFill>
                       <a:prstDash val="solid"/>
                     </a:lnT>
                     <a:lnB w="9525" cap="flat" cmpd="sng" algn="ctr">
                       <a:solidFill>
-                        <a:srgbClr val="D2EFDC"/>
+                        <a:srgbClr val="D5F6E0"/>
                       </a:solidFill>
                       <a:prstDash val="solid"/>
                     </a:lnB>
@@ -6181,7 +6494,7 @@
                       <a:r>
                         <a:rPr sz="1500" b="0">
                           <a:solidFill>
-                            <a:srgbClr val="2B2B2B"/>
+                            <a:srgbClr val="26231F"/>
                           </a:solidFill>
                         </a:rPr>
                         <a:t/>
@@ -6191,25 +6504,25 @@
                   <a:tcPr anchor="ctr" marL="73152" marR="73152">
                     <a:lnL w="9525" cap="flat" cmpd="sng" algn="ctr">
                       <a:solidFill>
-                        <a:srgbClr val="D2EFDC"/>
+                        <a:srgbClr val="D5F6E0"/>
                       </a:solidFill>
                       <a:prstDash val="solid"/>
                     </a:lnL>
                     <a:lnR w="9525" cap="flat" cmpd="sng" algn="ctr">
                       <a:solidFill>
-                        <a:srgbClr val="D2EFDC"/>
+                        <a:srgbClr val="D5F6E0"/>
                       </a:solidFill>
                       <a:prstDash val="solid"/>
                     </a:lnR>
                     <a:lnT w="9525" cap="flat" cmpd="sng" algn="ctr">
                       <a:solidFill>
-                        <a:srgbClr val="D2EFDC"/>
+                        <a:srgbClr val="D5F6E0"/>
                       </a:solidFill>
                       <a:prstDash val="solid"/>
                     </a:lnT>
                     <a:lnB w="9525" cap="flat" cmpd="sng" algn="ctr">
                       <a:solidFill>
-                        <a:srgbClr val="D2EFDC"/>
+                        <a:srgbClr val="D5F6E0"/>
                       </a:solidFill>
                       <a:prstDash val="solid"/>
                     </a:lnB>
@@ -6229,7 +6542,7 @@
                       <a:r>
                         <a:rPr sz="1500" b="1">
                           <a:solidFill>
-                            <a:srgbClr val="183A23"/>
+                            <a:srgbClr val="274932"/>
                           </a:solidFill>
                         </a:rPr>
                         <a:t>4</a:t>
@@ -6239,30 +6552,30 @@
                   <a:tcPr anchor="ctr" marL="73152" marR="73152">
                     <a:lnL w="9525" cap="flat" cmpd="sng" algn="ctr">
                       <a:solidFill>
-                        <a:srgbClr val="D2EFDC"/>
+                        <a:srgbClr val="D5F6E0"/>
                       </a:solidFill>
                       <a:prstDash val="solid"/>
                     </a:lnL>
                     <a:lnR w="9525" cap="flat" cmpd="sng" algn="ctr">
                       <a:solidFill>
-                        <a:srgbClr val="D2EFDC"/>
+                        <a:srgbClr val="D5F6E0"/>
                       </a:solidFill>
                       <a:prstDash val="solid"/>
                     </a:lnR>
                     <a:lnT w="9525" cap="flat" cmpd="sng" algn="ctr">
                       <a:solidFill>
-                        <a:srgbClr val="D2EFDC"/>
+                        <a:srgbClr val="D5F6E0"/>
                       </a:solidFill>
                       <a:prstDash val="solid"/>
                     </a:lnT>
                     <a:lnB w="9525" cap="flat" cmpd="sng" algn="ctr">
                       <a:solidFill>
-                        <a:srgbClr val="D2EFDC"/>
+                        <a:srgbClr val="D5F6E0"/>
                       </a:solidFill>
                       <a:prstDash val="solid"/>
                     </a:lnB>
                     <a:solidFill>
-                      <a:srgbClr val="D2EFDC"/>
+                      <a:srgbClr val="D5F6E0"/>
                     </a:solidFill>
                   </a:tcPr>
                 </a:tc>
@@ -6275,7 +6588,7 @@
                       <a:r>
                         <a:rPr sz="1500" b="0">
                           <a:solidFill>
-                            <a:srgbClr val="2B2B2B"/>
+                            <a:srgbClr val="26231F"/>
                           </a:solidFill>
                         </a:rPr>
                         <a:t>내용 입력</a:t>
@@ -6285,30 +6598,30 @@
                   <a:tcPr anchor="ctr" marL="73152" marR="73152">
                     <a:lnL w="9525" cap="flat" cmpd="sng" algn="ctr">
                       <a:solidFill>
-                        <a:srgbClr val="D2EFDC"/>
+                        <a:srgbClr val="D5F6E0"/>
                       </a:solidFill>
                       <a:prstDash val="solid"/>
                     </a:lnL>
                     <a:lnR w="9525" cap="flat" cmpd="sng" algn="ctr">
                       <a:solidFill>
-                        <a:srgbClr val="D2EFDC"/>
+                        <a:srgbClr val="D5F6E0"/>
                       </a:solidFill>
                       <a:prstDash val="solid"/>
                     </a:lnR>
                     <a:lnT w="9525" cap="flat" cmpd="sng" algn="ctr">
                       <a:solidFill>
-                        <a:srgbClr val="D2EFDC"/>
+                        <a:srgbClr val="D5F6E0"/>
                       </a:solidFill>
                       <a:prstDash val="solid"/>
                     </a:lnT>
                     <a:lnB w="9525" cap="flat" cmpd="sng" algn="ctr">
                       <a:solidFill>
-                        <a:srgbClr val="D2EFDC"/>
+                        <a:srgbClr val="D5F6E0"/>
                       </a:solidFill>
                       <a:prstDash val="solid"/>
                     </a:lnB>
                     <a:solidFill>
-                      <a:srgbClr val="F1F9F3"/>
+                      <a:srgbClr val="ECFBF1"/>
                     </a:solidFill>
                   </a:tcPr>
                 </a:tc>
@@ -6321,7 +6634,7 @@
                       <a:r>
                         <a:rPr sz="1500" b="0">
                           <a:solidFill>
-                            <a:srgbClr val="2B2B2B"/>
+                            <a:srgbClr val="26231F"/>
                           </a:solidFill>
                         </a:rPr>
                         <a:t/>
@@ -6331,30 +6644,30 @@
                   <a:tcPr anchor="ctr" marL="73152" marR="73152">
                     <a:lnL w="9525" cap="flat" cmpd="sng" algn="ctr">
                       <a:solidFill>
-                        <a:srgbClr val="D2EFDC"/>
+                        <a:srgbClr val="D5F6E0"/>
                       </a:solidFill>
                       <a:prstDash val="solid"/>
                     </a:lnL>
                     <a:lnR w="9525" cap="flat" cmpd="sng" algn="ctr">
                       <a:solidFill>
-                        <a:srgbClr val="D2EFDC"/>
+                        <a:srgbClr val="D5F6E0"/>
                       </a:solidFill>
                       <a:prstDash val="solid"/>
                     </a:lnR>
                     <a:lnT w="9525" cap="flat" cmpd="sng" algn="ctr">
                       <a:solidFill>
-                        <a:srgbClr val="D2EFDC"/>
+                        <a:srgbClr val="D5F6E0"/>
                       </a:solidFill>
                       <a:prstDash val="solid"/>
                     </a:lnT>
                     <a:lnB w="9525" cap="flat" cmpd="sng" algn="ctr">
                       <a:solidFill>
-                        <a:srgbClr val="D2EFDC"/>
+                        <a:srgbClr val="D5F6E0"/>
                       </a:solidFill>
                       <a:prstDash val="solid"/>
                     </a:lnB>
                     <a:solidFill>
-                      <a:srgbClr val="F1F9F3"/>
+                      <a:srgbClr val="ECFBF1"/>
                     </a:solidFill>
                   </a:tcPr>
                 </a:tc>
@@ -6367,7 +6680,7 @@
                       <a:r>
                         <a:rPr sz="1500" b="0">
                           <a:solidFill>
-                            <a:srgbClr val="2B2B2B"/>
+                            <a:srgbClr val="26231F"/>
                           </a:solidFill>
                         </a:rPr>
                         <a:t/>
@@ -6377,30 +6690,30 @@
                   <a:tcPr anchor="ctr" marL="73152" marR="73152">
                     <a:lnL w="9525" cap="flat" cmpd="sng" algn="ctr">
                       <a:solidFill>
-                        <a:srgbClr val="D2EFDC"/>
+                        <a:srgbClr val="D5F6E0"/>
                       </a:solidFill>
                       <a:prstDash val="solid"/>
                     </a:lnL>
                     <a:lnR w="9525" cap="flat" cmpd="sng" algn="ctr">
                       <a:solidFill>
-                        <a:srgbClr val="D2EFDC"/>
+                        <a:srgbClr val="D5F6E0"/>
                       </a:solidFill>
                       <a:prstDash val="solid"/>
                     </a:lnR>
                     <a:lnT w="9525" cap="flat" cmpd="sng" algn="ctr">
                       <a:solidFill>
-                        <a:srgbClr val="D2EFDC"/>
+                        <a:srgbClr val="D5F6E0"/>
                       </a:solidFill>
                       <a:prstDash val="solid"/>
                     </a:lnT>
                     <a:lnB w="9525" cap="flat" cmpd="sng" algn="ctr">
                       <a:solidFill>
-                        <a:srgbClr val="D2EFDC"/>
+                        <a:srgbClr val="D5F6E0"/>
                       </a:solidFill>
                       <a:prstDash val="solid"/>
                     </a:lnB>
                     <a:solidFill>
-                      <a:srgbClr val="F1F9F3"/>
+                      <a:srgbClr val="ECFBF1"/>
                     </a:solidFill>
                   </a:tcPr>
                 </a:tc>
@@ -6415,7 +6728,7 @@
                       <a:r>
                         <a:rPr sz="1500" b="1">
                           <a:solidFill>
-                            <a:srgbClr val="183A23"/>
+                            <a:srgbClr val="274932"/>
                           </a:solidFill>
                         </a:rPr>
                         <a:t>5</a:t>
@@ -6425,30 +6738,30 @@
                   <a:tcPr anchor="ctr" marL="73152" marR="73152">
                     <a:lnL w="9525" cap="flat" cmpd="sng" algn="ctr">
                       <a:solidFill>
-                        <a:srgbClr val="D2EFDC"/>
+                        <a:srgbClr val="D5F6E0"/>
                       </a:solidFill>
                       <a:prstDash val="solid"/>
                     </a:lnL>
                     <a:lnR w="9525" cap="flat" cmpd="sng" algn="ctr">
                       <a:solidFill>
-                        <a:srgbClr val="D2EFDC"/>
+                        <a:srgbClr val="D5F6E0"/>
                       </a:solidFill>
                       <a:prstDash val="solid"/>
                     </a:lnR>
                     <a:lnT w="9525" cap="flat" cmpd="sng" algn="ctr">
                       <a:solidFill>
-                        <a:srgbClr val="D2EFDC"/>
+                        <a:srgbClr val="D5F6E0"/>
                       </a:solidFill>
                       <a:prstDash val="solid"/>
                     </a:lnT>
                     <a:lnB w="9525" cap="flat" cmpd="sng" algn="ctr">
                       <a:solidFill>
-                        <a:srgbClr val="D2EFDC"/>
+                        <a:srgbClr val="D5F6E0"/>
                       </a:solidFill>
                       <a:prstDash val="solid"/>
                     </a:lnB>
                     <a:solidFill>
-                      <a:srgbClr val="D2EFDC"/>
+                      <a:srgbClr val="D5F6E0"/>
                     </a:solidFill>
                   </a:tcPr>
                 </a:tc>
@@ -6461,7 +6774,7 @@
                       <a:r>
                         <a:rPr sz="1500" b="0">
                           <a:solidFill>
-                            <a:srgbClr val="2B2B2B"/>
+                            <a:srgbClr val="26231F"/>
                           </a:solidFill>
                         </a:rPr>
                         <a:t>내용 입력</a:t>
@@ -6471,25 +6784,25 @@
                   <a:tcPr anchor="ctr" marL="73152" marR="73152">
                     <a:lnL w="9525" cap="flat" cmpd="sng" algn="ctr">
                       <a:solidFill>
-                        <a:srgbClr val="D2EFDC"/>
+                        <a:srgbClr val="D5F6E0"/>
                       </a:solidFill>
                       <a:prstDash val="solid"/>
                     </a:lnL>
                     <a:lnR w="9525" cap="flat" cmpd="sng" algn="ctr">
                       <a:solidFill>
-                        <a:srgbClr val="D2EFDC"/>
+                        <a:srgbClr val="D5F6E0"/>
                       </a:solidFill>
                       <a:prstDash val="solid"/>
                     </a:lnR>
                     <a:lnT w="9525" cap="flat" cmpd="sng" algn="ctr">
                       <a:solidFill>
-                        <a:srgbClr val="D2EFDC"/>
+                        <a:srgbClr val="D5F6E0"/>
                       </a:solidFill>
                       <a:prstDash val="solid"/>
                     </a:lnT>
                     <a:lnB w="9525" cap="flat" cmpd="sng" algn="ctr">
                       <a:solidFill>
-                        <a:srgbClr val="D2EFDC"/>
+                        <a:srgbClr val="D5F6E0"/>
                       </a:solidFill>
                       <a:prstDash val="solid"/>
                     </a:lnB>
@@ -6507,7 +6820,7 @@
                       <a:r>
                         <a:rPr sz="1500" b="0">
                           <a:solidFill>
-                            <a:srgbClr val="2B2B2B"/>
+                            <a:srgbClr val="26231F"/>
                           </a:solidFill>
                         </a:rPr>
                         <a:t/>
@@ -6517,25 +6830,25 @@
                   <a:tcPr anchor="ctr" marL="73152" marR="73152">
                     <a:lnL w="9525" cap="flat" cmpd="sng" algn="ctr">
                       <a:solidFill>
-                        <a:srgbClr val="D2EFDC"/>
+                        <a:srgbClr val="D5F6E0"/>
                       </a:solidFill>
                       <a:prstDash val="solid"/>
                     </a:lnL>
                     <a:lnR w="9525" cap="flat" cmpd="sng" algn="ctr">
                       <a:solidFill>
-                        <a:srgbClr val="D2EFDC"/>
+                        <a:srgbClr val="D5F6E0"/>
                       </a:solidFill>
                       <a:prstDash val="solid"/>
                     </a:lnR>
                     <a:lnT w="9525" cap="flat" cmpd="sng" algn="ctr">
                       <a:solidFill>
-                        <a:srgbClr val="D2EFDC"/>
+                        <a:srgbClr val="D5F6E0"/>
                       </a:solidFill>
                       <a:prstDash val="solid"/>
                     </a:lnT>
                     <a:lnB w="9525" cap="flat" cmpd="sng" algn="ctr">
                       <a:solidFill>
-                        <a:srgbClr val="D2EFDC"/>
+                        <a:srgbClr val="D5F6E0"/>
                       </a:solidFill>
                       <a:prstDash val="solid"/>
                     </a:lnB>
@@ -6553,7 +6866,7 @@
                       <a:r>
                         <a:rPr sz="1500" b="0">
                           <a:solidFill>
-                            <a:srgbClr val="2B2B2B"/>
+                            <a:srgbClr val="26231F"/>
                           </a:solidFill>
                         </a:rPr>
                         <a:t/>
@@ -6563,25 +6876,25 @@
                   <a:tcPr anchor="ctr" marL="73152" marR="73152">
                     <a:lnL w="9525" cap="flat" cmpd="sng" algn="ctr">
                       <a:solidFill>
-                        <a:srgbClr val="D2EFDC"/>
+                        <a:srgbClr val="D5F6E0"/>
                       </a:solidFill>
                       <a:prstDash val="solid"/>
                     </a:lnL>
                     <a:lnR w="9525" cap="flat" cmpd="sng" algn="ctr">
                       <a:solidFill>
-                        <a:srgbClr val="D2EFDC"/>
+                        <a:srgbClr val="D5F6E0"/>
                       </a:solidFill>
                       <a:prstDash val="solid"/>
                     </a:lnR>
                     <a:lnT w="9525" cap="flat" cmpd="sng" algn="ctr">
                       <a:solidFill>
-                        <a:srgbClr val="D2EFDC"/>
+                        <a:srgbClr val="D5F6E0"/>
                       </a:solidFill>
                       <a:prstDash val="solid"/>
                     </a:lnT>
                     <a:lnB w="9525" cap="flat" cmpd="sng" algn="ctr">
                       <a:solidFill>
-                        <a:srgbClr val="D2EFDC"/>
+                        <a:srgbClr val="D5F6E0"/>
                       </a:solidFill>
                       <a:prstDash val="solid"/>
                     </a:lnB>
@@ -6606,6 +6919,14 @@
 <file path=ppt/slides/slide6.xml><?xml version="1.0" encoding="utf-8"?>
 <p:sld xmlns:a="http://schemas.openxmlformats.org/drawingml/2006/main" xmlns:p="http://schemas.openxmlformats.org/presentationml/2006/main" xmlns:r="http://schemas.openxmlformats.org/officeDocument/2006/relationships">
   <p:cSld>
+    <p:bg>
+      <p:bgPr>
+        <a:solidFill>
+          <a:srgbClr val="D5F6E0"/>
+        </a:solidFill>
+        <a:effectLst/>
+      </p:bgPr>
+    </p:bg>
     <p:spTree>
       <p:nvGrpSpPr>
         <p:cNvPr id="1" name=""/>
@@ -6613,30 +6934,102 @@
         <p:nvPr/>
       </p:nvGrpSpPr>
       <p:grpSpPr/>
-      <p:pic>
-        <p:nvPicPr>
-          <p:cNvPr id="3" name="표지 그림" descr="talk-47.jpg"/>
-          <p:cNvPicPr>
-            <a:picLocks noChangeAspect="1"/>
-          </p:cNvPicPr>
+      <p:sp>
+        <p:nvSpPr>
+          <p:cNvPr id="3" name="장식"/>
+          <p:cNvSpPr/>
           <p:nvPr/>
-        </p:nvPicPr>
-        <p:blipFill>
-          <a:blip r:embed="rId2"/>
-          <a:stretch>
-            <a:fillRect/>
-          </a:stretch>
-        </p:blipFill>
-        <p:spPr>
-          <a:xfrm>
-            <a:off x="0" y="0"/>
-            <a:ext cx="12191695" cy="6858000"/>
+        </p:nvSpPr>
+        <p:spPr>
+          <a:xfrm>
+            <a:off x="7802684" y="0"/>
+            <a:ext cx="4389010" cy="6858000"/>
           </a:xfrm>
           <a:prstGeom prst="rect">
             <a:avLst/>
           </a:prstGeom>
-        </p:spPr>
-      </p:pic>
+          <a:solidFill>
+            <a:srgbClr val="FFFFFF"/>
+          </a:solidFill>
+          <a:ln>
+            <a:noFill/>
+          </a:ln>
+        </p:spPr>
+        <p:txBody>
+          <a:bodyPr rtlCol="0" anchor="ctr"/>
+          <a:lstStyle/>
+          <a:p>
+            <a:pPr algn="ctr"/>
+          </a:p>
+        </p:txBody>
+      </p:sp>
+      <p:sp>
+        <p:nvSpPr>
+          <p:cNvPr id="4" name="장식"/>
+          <p:cNvSpPr/>
+          <p:nvPr/>
+        </p:nvSpPr>
+        <p:spPr>
+          <a:xfrm>
+            <a:off x="8168435" y="365760"/>
+            <a:ext cx="3657508" cy="6126480"/>
+          </a:xfrm>
+          <a:prstGeom prst="rect">
+            <a:avLst/>
+          </a:prstGeom>
+          <a:noFill/>
+          <a:ln w="9525">
+            <a:solidFill>
+              <a:srgbClr val="26231F"/>
+            </a:solidFill>
+          </a:ln>
+        </p:spPr>
+        <p:txBody>
+          <a:bodyPr rtlCol="0" anchor="ctr"/>
+          <a:lstStyle/>
+          <a:p>
+            <a:pPr algn="ctr"/>
+          </a:p>
+        </p:txBody>
+      </p:sp>
+      <p:sp>
+        <p:nvSpPr>
+          <p:cNvPr id="5" name="라벨"/>
+          <p:cNvSpPr txBox="1"/>
+          <p:nvPr/>
+        </p:nvSpPr>
+        <p:spPr>
+          <a:xfrm>
+            <a:off x="822960" y="2148840"/>
+            <a:ext cx="5608179" cy="274320"/>
+          </a:xfrm>
+          <a:prstGeom prst="rect">
+            <a:avLst/>
+          </a:prstGeom>
+          <a:noFill/>
+        </p:spPr>
+        <p:txBody>
+          <a:bodyPr wrap="square" lIns="54864" rIns="54864" tIns="27432" bIns="27432" anchor="t">
+            <a:noAutofit/>
+          </a:bodyPr>
+          <a:lstStyle/>
+          <a:p>
+            <a:pPr algn="l">
+              <a:lnSpc>
+                <a:spcPct val="115000"/>
+              </a:lnSpc>
+            </a:pPr>
+            <a:r>
+              <a:rPr sz="1000" b="1" i="0" spc="250">
+                <a:solidFill>
+                  <a:srgbClr val="26231F"/>
+                </a:solidFill>
+              </a:rPr>
+              <a:t>PRESENTATION</a:t>
+            </a:r>
+          </a:p>
+        </p:txBody>
+      </p:sp>
       <p:sp>
         <p:nvSpPr>
           <p:cNvPr id="2" name="Title 1"/>
@@ -6649,8 +7042,8 @@
         </p:nvSpPr>
         <p:spPr>
           <a:xfrm>
-            <a:off x="853418" y="2057400"/>
-            <a:ext cx="6095847" cy="1554480"/>
+            <a:off x="822960" y="2606040"/>
+            <a:ext cx="5608179" cy="1188720"/>
           </a:xfrm>
         </p:spPr>
         <p:txBody>
@@ -6665,9 +7058,9 @@
               </a:lnSpc>
             </a:pPr>
             <a:r>
-              <a:rPr sz="3600" b="1" i="0">
+              <a:rPr sz="4000" b="1" i="0">
                 <a:solidFill>
-                  <a:srgbClr val="183A23"/>
+                  <a:srgbClr val="26231F"/>
                 </a:solidFill>
               </a:rPr>
               <a:t>감사합니다</a:t>
@@ -6677,14 +7070,14 @@
       </p:sp>
       <p:sp>
         <p:nvSpPr>
-          <p:cNvPr id="4" name="한 줄 문구"/>
+          <p:cNvPr id="6" name="한 줄 문구"/>
           <p:cNvSpPr txBox="1"/>
           <p:nvPr/>
         </p:nvSpPr>
         <p:spPr>
           <a:xfrm>
-            <a:off x="853418" y="3749039"/>
-            <a:ext cx="6095847" cy="822960"/>
+            <a:off x="822960" y="3886200"/>
+            <a:ext cx="5608179" cy="822960"/>
           </a:xfrm>
           <a:prstGeom prst="rect">
             <a:avLst/>
@@ -6703,9 +7096,9 @@
               </a:lnSpc>
             </a:pPr>
             <a:r>
-              <a:rPr sz="1700" b="0" i="1">
+              <a:rPr sz="1700" b="0" i="0">
                 <a:solidFill>
-                  <a:srgbClr val="183A23"/>
+                  <a:srgbClr val="26231F"/>
                 </a:solidFill>
               </a:rPr>
               <a:t>끝까지 들어 주셔서 고맙습니다</a:t>
@@ -6715,14 +7108,14 @@
       </p:sp>
       <p:sp>
         <p:nvSpPr>
-          <p:cNvPr id="5" name="안내 문구"/>
+          <p:cNvPr id="7" name="안내 문구"/>
           <p:cNvSpPr txBox="1"/>
           <p:nvPr/>
         </p:nvSpPr>
         <p:spPr>
           <a:xfrm>
-            <a:off x="853418" y="4617720"/>
-            <a:ext cx="6095847" cy="914400"/>
+            <a:off x="822960" y="4754880"/>
+            <a:ext cx="5608179" cy="914400"/>
           </a:xfrm>
           <a:prstGeom prst="rect">
             <a:avLst/>
@@ -6743,7 +7136,7 @@
             <a:r>
               <a:rPr sz="1400" b="0" i="0">
                 <a:solidFill>
-                  <a:srgbClr val="666666"/>
+                  <a:srgbClr val="26231F"/>
                 </a:solidFill>
               </a:rPr>
               <a:t>문의 · 연락처를 입력하세요</a:t>
@@ -6770,34 +7163,34 @@
         <a:sysClr val="window" lastClr="FFFFFF"/>
       </a:lt1>
       <a:dk2>
-        <a:srgbClr val="183A23"/>
+        <a:srgbClr val="274932"/>
       </a:dk2>
       <a:lt2>
-        <a:srgbClr val="F1F9F3"/>
+        <a:srgbClr val="ECFBF1"/>
       </a:lt2>
       <a:accent1>
-        <a:srgbClr val="29653D"/>
+        <a:srgbClr val="98E1B1"/>
       </a:accent1>
       <a:accent2>
-        <a:srgbClr val="833B91"/>
+        <a:srgbClr val="B8EAE0"/>
       </a:accent2>
       <a:accent3>
-        <a:srgbClr val="183A23"/>
+        <a:srgbClr val="274932"/>
       </a:accent3>
       <a:accent4>
-        <a:srgbClr val="D2EFDC"/>
+        <a:srgbClr val="D5F6E0"/>
       </a:accent4>
       <a:accent5>
-        <a:srgbClr val="565067"/>
+        <a:srgbClr val="A8E6C8"/>
       </a:accent5>
       <a:accent6>
-        <a:srgbClr val="74897B"/>
+        <a:srgbClr val="7D9284"/>
       </a:accent6>
       <a:hlink>
-        <a:srgbClr val="29653D"/>
+        <a:srgbClr val="98E1B1"/>
       </a:hlink>
       <a:folHlink>
-        <a:srgbClr val="183A23"/>
+        <a:srgbClr val="274932"/>
       </a:folHlink>
     </a:clrScheme>
     <a:fontScheme name="Office">
